--- a/eval/out/gates_slide1.pptx
+++ b/eval/out/gates_slide1.pptx
@@ -3081,6 +3081,14 @@
 <file path=ppt/slides/slide1.xml><?xml version="1.0" encoding="utf-8"?>
 <p:sld xmlns:a="http://schemas.openxmlformats.org/drawingml/2006/main" xmlns:p="http://schemas.openxmlformats.org/presentationml/2006/main" xmlns:r="http://schemas.openxmlformats.org/officeDocument/2006/relationships">
   <p:cSld>
+    <p:bg>
+      <p:bgPr>
+        <a:solidFill>
+          <a:srgbClr val="FFFFFF"/>
+        </a:solidFill>
+        <a:effectLst/>
+      </p:bgPr>
+    </p:bg>
     <p:spTree>
       <p:nvGrpSpPr>
         <p:cNvPr id="1" name=""/>

--- a/eval/out/gates_slide1.pptx
+++ b/eval/out/gates_slide1.pptx
@@ -3104,8 +3104,8 @@
         </p:nvSpPr>
         <p:spPr>
           <a:xfrm>
-            <a:off x="411480" y="467194"/>
-            <a:ext cx="11369040" cy="288603"/>
+            <a:off x="411480" y="274320"/>
+            <a:ext cx="11369040" cy="295818"/>
           </a:xfrm>
           <a:prstGeom prst="rect">
             <a:avLst/>
@@ -3120,7 +3120,7 @@
           <a:p>
             <a:pPr algn="l">
               <a:lnSpc>
-                <a:spcPts val="2272"/>
+                <a:spcPts val="2329"/>
               </a:lnSpc>
               <a:spcBef>
                 <a:spcPts val="0"/>
@@ -3212,8 +3212,8 @@
         </p:nvSpPr>
         <p:spPr>
           <a:xfrm>
-            <a:off x="411480" y="783229"/>
-            <a:ext cx="11369040" cy="304056"/>
+            <a:off x="411480" y="597570"/>
+            <a:ext cx="11369040" cy="311658"/>
           </a:xfrm>
           <a:prstGeom prst="rect">
             <a:avLst/>
@@ -3228,7 +3228,7 @@
           <a:p>
             <a:pPr algn="l">
               <a:lnSpc>
-                <a:spcPts val="1197"/>
+                <a:spcPts val="1227"/>
               </a:lnSpc>
               <a:spcBef>
                 <a:spcPts val="0"/>
@@ -3493,7 +3493,7 @@
           <a:p>
             <a:pPr algn="l">
               <a:lnSpc>
-                <a:spcPts val="1197"/>
+                <a:spcPts val="1227"/>
               </a:lnSpc>
               <a:spcBef>
                 <a:spcPts val="0"/>
@@ -3604,7 +3604,7 @@
         <p:spPr>
           <a:xfrm>
             <a:off x="411480" y="1691640"/>
-            <a:ext cx="266070" cy="144978"/>
+            <a:ext cx="266070" cy="148145"/>
           </a:xfrm>
           <a:prstGeom prst="roundRect">
             <a:avLst>
@@ -3641,7 +3641,7 @@
           <a:p>
             <a:pPr algn="ctr">
               <a:lnSpc>
-                <a:spcPts val="997"/>
+                <a:spcPts val="1022"/>
               </a:lnSpc>
               <a:spcBef>
                 <a:spcPts val="0"/>
@@ -3671,7 +3671,7 @@
         <p:spPr>
           <a:xfrm>
             <a:off x="704982" y="1691640"/>
-            <a:ext cx="752894" cy="144978"/>
+            <a:ext cx="752894" cy="148145"/>
           </a:xfrm>
           <a:prstGeom prst="rect">
             <a:avLst/>
@@ -3686,7 +3686,7 @@
           <a:p>
             <a:pPr algn="l">
               <a:lnSpc>
-                <a:spcPts val="997"/>
+                <a:spcPts val="1022"/>
               </a:lnSpc>
               <a:spcBef>
                 <a:spcPts val="0"/>
@@ -3716,7 +3716,7 @@
         <p:spPr>
           <a:xfrm>
             <a:off x="1512740" y="1691640"/>
-            <a:ext cx="215562" cy="144978"/>
+            <a:ext cx="215562" cy="148145"/>
           </a:xfrm>
           <a:prstGeom prst="roundRect">
             <a:avLst>
@@ -3753,7 +3753,7 @@
           <a:p>
             <a:pPr algn="ctr">
               <a:lnSpc>
-                <a:spcPts val="997"/>
+                <a:spcPts val="1022"/>
               </a:lnSpc>
               <a:spcBef>
                 <a:spcPts val="0"/>
@@ -3783,7 +3783,7 @@
         <p:spPr>
           <a:xfrm>
             <a:off x="1755734" y="1691640"/>
-            <a:ext cx="665690" cy="144978"/>
+            <a:ext cx="665690" cy="148145"/>
           </a:xfrm>
           <a:prstGeom prst="rect">
             <a:avLst/>
@@ -3798,7 +3798,7 @@
           <a:p>
             <a:pPr algn="l">
               <a:lnSpc>
-                <a:spcPts val="997"/>
+                <a:spcPts val="1022"/>
               </a:lnSpc>
               <a:spcBef>
                 <a:spcPts val="0"/>
@@ -3828,7 +3828,7 @@
         <p:spPr>
           <a:xfrm>
             <a:off x="2476288" y="1691640"/>
-            <a:ext cx="263745" cy="144978"/>
+            <a:ext cx="263745" cy="148145"/>
           </a:xfrm>
           <a:prstGeom prst="roundRect">
             <a:avLst>
@@ -3865,7 +3865,7 @@
           <a:p>
             <a:pPr algn="ctr">
               <a:lnSpc>
-                <a:spcPts val="997"/>
+                <a:spcPts val="1022"/>
               </a:lnSpc>
               <a:spcBef>
                 <a:spcPts val="0"/>
@@ -3895,7 +3895,7 @@
         <p:spPr>
           <a:xfrm>
             <a:off x="2767465" y="1691640"/>
-            <a:ext cx="1128453" cy="144978"/>
+            <a:ext cx="1128453" cy="148145"/>
           </a:xfrm>
           <a:prstGeom prst="rect">
             <a:avLst/>
@@ -3910,7 +3910,7 @@
           <a:p>
             <a:pPr algn="l">
               <a:lnSpc>
-                <a:spcPts val="997"/>
+                <a:spcPts val="1022"/>
               </a:lnSpc>
               <a:spcBef>
                 <a:spcPts val="0"/>
@@ -3940,7 +3940,7 @@
         <p:spPr>
           <a:xfrm>
             <a:off x="3950782" y="1691640"/>
-            <a:ext cx="271745" cy="144978"/>
+            <a:ext cx="271745" cy="148145"/>
           </a:xfrm>
           <a:prstGeom prst="roundRect">
             <a:avLst>
@@ -3977,7 +3977,7 @@
           <a:p>
             <a:pPr algn="ctr">
               <a:lnSpc>
-                <a:spcPts val="997"/>
+                <a:spcPts val="1022"/>
               </a:lnSpc>
               <a:spcBef>
                 <a:spcPts val="0"/>
@@ -4007,7 +4007,7 @@
         <p:spPr>
           <a:xfrm>
             <a:off x="4249959" y="1691640"/>
-            <a:ext cx="1728463" cy="144978"/>
+            <a:ext cx="1728463" cy="148145"/>
           </a:xfrm>
           <a:prstGeom prst="rect">
             <a:avLst/>
@@ -4022,7 +4022,7 @@
           <a:p>
             <a:pPr algn="l">
               <a:lnSpc>
-                <a:spcPts val="997"/>
+                <a:spcPts val="1022"/>
               </a:lnSpc>
               <a:spcBef>
                 <a:spcPts val="0"/>
@@ -4052,7 +4052,7 @@
         <p:spPr>
           <a:xfrm>
             <a:off x="6033286" y="1691640"/>
-            <a:ext cx="251002" cy="144978"/>
+            <a:ext cx="251002" cy="148145"/>
           </a:xfrm>
           <a:prstGeom prst="roundRect">
             <a:avLst>
@@ -4089,7 +4089,7 @@
           <a:p>
             <a:pPr algn="ctr">
               <a:lnSpc>
-                <a:spcPts val="997"/>
+                <a:spcPts val="1022"/>
               </a:lnSpc>
               <a:spcBef>
                 <a:spcPts val="0"/>
@@ -4119,7 +4119,7 @@
         <p:spPr>
           <a:xfrm>
             <a:off x="6311720" y="1691640"/>
-            <a:ext cx="1287280" cy="144978"/>
+            <a:ext cx="1287280" cy="148145"/>
           </a:xfrm>
           <a:prstGeom prst="rect">
             <a:avLst/>
@@ -4134,7 +4134,7 @@
           <a:p>
             <a:pPr algn="l">
               <a:lnSpc>
-                <a:spcPts val="997"/>
+                <a:spcPts val="1022"/>
               </a:lnSpc>
               <a:spcBef>
                 <a:spcPts val="0"/>
@@ -4164,7 +4164,7 @@
         <p:spPr>
           <a:xfrm>
             <a:off x="7653864" y="1691640"/>
-            <a:ext cx="235747" cy="144978"/>
+            <a:ext cx="235747" cy="148145"/>
           </a:xfrm>
           <a:prstGeom prst="roundRect">
             <a:avLst>
@@ -4201,7 +4201,7 @@
           <a:p>
             <a:pPr algn="ctr">
               <a:lnSpc>
-                <a:spcPts val="997"/>
+                <a:spcPts val="1022"/>
               </a:lnSpc>
               <a:spcBef>
                 <a:spcPts val="0"/>
@@ -4231,7 +4231,7 @@
         <p:spPr>
           <a:xfrm>
             <a:off x="7917043" y="1691640"/>
-            <a:ext cx="957207" cy="144978"/>
+            <a:ext cx="957207" cy="148145"/>
           </a:xfrm>
           <a:prstGeom prst="rect">
             <a:avLst/>
@@ -4246,7 +4246,7 @@
           <a:p>
             <a:pPr algn="l">
               <a:lnSpc>
-                <a:spcPts val="997"/>
+                <a:spcPts val="1022"/>
               </a:lnSpc>
               <a:spcBef>
                 <a:spcPts val="0"/>
@@ -4275,8 +4275,8 @@
         </p:nvSpPr>
         <p:spPr>
           <a:xfrm>
-            <a:off x="411480" y="1909770"/>
-            <a:ext cx="2237232" cy="472976"/>
+            <a:off x="411480" y="1912937"/>
+            <a:ext cx="2237232" cy="484800"/>
           </a:xfrm>
           <a:prstGeom prst="rect">
             <a:avLst/>
@@ -4291,7 +4291,7 @@
           <a:p>
             <a:pPr algn="l">
               <a:lnSpc>
-                <a:spcPts val="1862"/>
+                <a:spcPts val="1908"/>
               </a:lnSpc>
               <a:spcBef>
                 <a:spcPts val="0"/>
@@ -4331,7 +4331,7 @@
           <a:p>
             <a:pPr algn="l">
               <a:lnSpc>
-                <a:spcPts val="1862"/>
+                <a:spcPts val="1908"/>
               </a:lnSpc>
               <a:spcBef>
                 <a:spcPts val="0"/>
@@ -4360,8 +4360,8 @@
         </p:nvSpPr>
         <p:spPr>
           <a:xfrm>
-            <a:off x="411480" y="2529050"/>
-            <a:ext cx="109728" cy="152028"/>
+            <a:off x="411480" y="2544041"/>
+            <a:ext cx="109728" cy="155829"/>
           </a:xfrm>
           <a:prstGeom prst="rect">
             <a:avLst/>
@@ -4376,7 +4376,7 @@
           <a:p>
             <a:pPr algn="l">
               <a:lnSpc>
-                <a:spcPts val="1197"/>
+                <a:spcPts val="1227"/>
               </a:lnSpc>
               <a:spcBef>
                 <a:spcPts val="0"/>
@@ -4405,8 +4405,8 @@
         </p:nvSpPr>
         <p:spPr>
           <a:xfrm>
-            <a:off x="521208" y="2529050"/>
-            <a:ext cx="2127504" cy="456084"/>
+            <a:off x="521208" y="2544041"/>
+            <a:ext cx="2127504" cy="467487"/>
           </a:xfrm>
           <a:prstGeom prst="rect">
             <a:avLst/>
@@ -4421,7 +4421,7 @@
           <a:p>
             <a:pPr algn="l">
               <a:lnSpc>
-                <a:spcPts val="1197"/>
+                <a:spcPts val="1227"/>
               </a:lnSpc>
               <a:spcBef>
                 <a:spcPts val="0"/>
@@ -4470,7 +4470,7 @@
           <a:p>
             <a:pPr algn="l">
               <a:lnSpc>
-                <a:spcPts val="1197"/>
+                <a:spcPts val="1227"/>
               </a:lnSpc>
               <a:spcBef>
                 <a:spcPts val="0"/>
@@ -4510,7 +4510,7 @@
           <a:p>
             <a:pPr algn="l">
               <a:lnSpc>
-                <a:spcPts val="1197"/>
+                <a:spcPts val="1227"/>
               </a:lnSpc>
               <a:spcBef>
                 <a:spcPts val="0"/>
@@ -4548,8 +4548,8 @@
         </p:nvSpPr>
         <p:spPr>
           <a:xfrm>
-            <a:off x="411480" y="3218306"/>
-            <a:ext cx="109728" cy="152028"/>
+            <a:off x="411480" y="3244700"/>
+            <a:ext cx="109728" cy="155829"/>
           </a:xfrm>
           <a:prstGeom prst="rect">
             <a:avLst/>
@@ -4564,7 +4564,7 @@
           <a:p>
             <a:pPr algn="l">
               <a:lnSpc>
-                <a:spcPts val="1197"/>
+                <a:spcPts val="1227"/>
               </a:lnSpc>
               <a:spcBef>
                 <a:spcPts val="0"/>
@@ -4593,8 +4593,8 @@
         </p:nvSpPr>
         <p:spPr>
           <a:xfrm>
-            <a:off x="521208" y="3218306"/>
-            <a:ext cx="2127504" cy="456084"/>
+            <a:off x="521208" y="3244700"/>
+            <a:ext cx="2127504" cy="467487"/>
           </a:xfrm>
           <a:prstGeom prst="rect">
             <a:avLst/>
@@ -4609,7 +4609,7 @@
           <a:p>
             <a:pPr algn="l">
               <a:lnSpc>
-                <a:spcPts val="1197"/>
+                <a:spcPts val="1227"/>
               </a:lnSpc>
               <a:spcBef>
                 <a:spcPts val="0"/>
@@ -4676,7 +4676,7 @@
           <a:p>
             <a:pPr algn="l">
               <a:lnSpc>
-                <a:spcPts val="1197"/>
+                <a:spcPts val="1227"/>
               </a:lnSpc>
               <a:spcBef>
                 <a:spcPts val="0"/>
@@ -4734,7 +4734,7 @@
           <a:p>
             <a:pPr algn="l">
               <a:lnSpc>
-                <a:spcPts val="1197"/>
+                <a:spcPts val="1227"/>
               </a:lnSpc>
               <a:spcBef>
                 <a:spcPts val="0"/>
@@ -4763,8 +4763,8 @@
         </p:nvSpPr>
         <p:spPr>
           <a:xfrm>
-            <a:off x="411480" y="3907562"/>
-            <a:ext cx="109728" cy="152028"/>
+            <a:off x="411480" y="3945359"/>
+            <a:ext cx="109728" cy="155829"/>
           </a:xfrm>
           <a:prstGeom prst="rect">
             <a:avLst/>
@@ -4779,7 +4779,7 @@
           <a:p>
             <a:pPr algn="l">
               <a:lnSpc>
-                <a:spcPts val="1197"/>
+                <a:spcPts val="1227"/>
               </a:lnSpc>
               <a:spcBef>
                 <a:spcPts val="0"/>
@@ -4808,8 +4808,8 @@
         </p:nvSpPr>
         <p:spPr>
           <a:xfrm>
-            <a:off x="521208" y="3907562"/>
-            <a:ext cx="2127504" cy="456084"/>
+            <a:off x="521208" y="3945359"/>
+            <a:ext cx="2127504" cy="467487"/>
           </a:xfrm>
           <a:prstGeom prst="rect">
             <a:avLst/>
@@ -4824,7 +4824,7 @@
           <a:p>
             <a:pPr algn="l">
               <a:lnSpc>
-                <a:spcPts val="1197"/>
+                <a:spcPts val="1227"/>
               </a:lnSpc>
               <a:spcBef>
                 <a:spcPts val="0"/>
@@ -4873,7 +4873,7 @@
           <a:p>
             <a:pPr algn="l">
               <a:lnSpc>
-                <a:spcPts val="1197"/>
+                <a:spcPts val="1227"/>
               </a:lnSpc>
               <a:spcBef>
                 <a:spcPts val="0"/>
@@ -4940,7 +4940,7 @@
           <a:p>
             <a:pPr algn="l">
               <a:lnSpc>
-                <a:spcPts val="1197"/>
+                <a:spcPts val="1227"/>
               </a:lnSpc>
               <a:spcBef>
                 <a:spcPts val="0"/>
@@ -4969,8 +4969,8 @@
         </p:nvSpPr>
         <p:spPr>
           <a:xfrm>
-            <a:off x="411480" y="4596818"/>
-            <a:ext cx="109728" cy="152028"/>
+            <a:off x="411480" y="4646018"/>
+            <a:ext cx="109728" cy="155829"/>
           </a:xfrm>
           <a:prstGeom prst="rect">
             <a:avLst/>
@@ -4985,7 +4985,7 @@
           <a:p>
             <a:pPr algn="l">
               <a:lnSpc>
-                <a:spcPts val="1197"/>
+                <a:spcPts val="1227"/>
               </a:lnSpc>
               <a:spcBef>
                 <a:spcPts val="0"/>
@@ -5014,8 +5014,8 @@
         </p:nvSpPr>
         <p:spPr>
           <a:xfrm>
-            <a:off x="521208" y="4596818"/>
-            <a:ext cx="2127504" cy="304056"/>
+            <a:off x="521208" y="4646018"/>
+            <a:ext cx="2127504" cy="311658"/>
           </a:xfrm>
           <a:prstGeom prst="rect">
             <a:avLst/>
@@ -5030,7 +5030,7 @@
           <a:p>
             <a:pPr algn="l">
               <a:lnSpc>
-                <a:spcPts val="1197"/>
+                <a:spcPts val="1227"/>
               </a:lnSpc>
               <a:spcBef>
                 <a:spcPts val="0"/>
@@ -5097,7 +5097,7 @@
           <a:p>
             <a:pPr algn="l">
               <a:lnSpc>
-                <a:spcPts val="1197"/>
+                <a:spcPts val="1227"/>
               </a:lnSpc>
               <a:spcBef>
                 <a:spcPts val="0"/>
@@ -5162,8 +5162,8 @@
         </p:nvSpPr>
         <p:spPr>
           <a:xfrm>
-            <a:off x="411480" y="5134046"/>
-            <a:ext cx="109728" cy="152028"/>
+            <a:off x="411480" y="5190848"/>
+            <a:ext cx="109728" cy="155829"/>
           </a:xfrm>
           <a:prstGeom prst="rect">
             <a:avLst/>
@@ -5178,7 +5178,7 @@
           <a:p>
             <a:pPr algn="l">
               <a:lnSpc>
-                <a:spcPts val="1197"/>
+                <a:spcPts val="1227"/>
               </a:lnSpc>
               <a:spcBef>
                 <a:spcPts val="0"/>
@@ -5207,8 +5207,8 @@
         </p:nvSpPr>
         <p:spPr>
           <a:xfrm>
-            <a:off x="521208" y="5134046"/>
-            <a:ext cx="2127504" cy="456084"/>
+            <a:off x="521208" y="5190848"/>
+            <a:ext cx="2127504" cy="467487"/>
           </a:xfrm>
           <a:prstGeom prst="rect">
             <a:avLst/>
@@ -5223,7 +5223,7 @@
           <a:p>
             <a:pPr algn="l">
               <a:lnSpc>
-                <a:spcPts val="1197"/>
+                <a:spcPts val="1227"/>
               </a:lnSpc>
               <a:spcBef>
                 <a:spcPts val="0"/>
@@ -5299,7 +5299,7 @@
           <a:p>
             <a:pPr algn="l">
               <a:lnSpc>
-                <a:spcPts val="1197"/>
+                <a:spcPts val="1227"/>
               </a:lnSpc>
               <a:spcBef>
                 <a:spcPts val="0"/>
@@ -5357,7 +5357,7 @@
           <a:p>
             <a:pPr algn="l">
               <a:lnSpc>
-                <a:spcPts val="1197"/>
+                <a:spcPts val="1227"/>
               </a:lnSpc>
               <a:spcBef>
                 <a:spcPts val="0"/>
@@ -5386,8 +5386,8 @@
         </p:nvSpPr>
         <p:spPr>
           <a:xfrm>
-            <a:off x="2740152" y="1909770"/>
-            <a:ext cx="6432042" cy="236488"/>
+            <a:off x="2740152" y="1912937"/>
+            <a:ext cx="6432042" cy="242400"/>
           </a:xfrm>
           <a:prstGeom prst="rect">
             <a:avLst/>
@@ -5402,7 +5402,7 @@
           <a:p>
             <a:pPr algn="l">
               <a:lnSpc>
-                <a:spcPts val="1862"/>
+                <a:spcPts val="1908"/>
               </a:lnSpc>
               <a:spcBef>
                 <a:spcPts val="0"/>
@@ -5476,8 +5476,8 @@
         </p:nvSpPr>
         <p:spPr>
           <a:xfrm>
-            <a:off x="2740152" y="2255986"/>
-            <a:ext cx="1157768" cy="289956"/>
+            <a:off x="2740152" y="2265065"/>
+            <a:ext cx="1157768" cy="296290"/>
           </a:xfrm>
           <a:prstGeom prst="rect">
             <a:avLst/>
@@ -5514,7 +5514,7 @@
           <a:p>
             <a:pPr algn="ctr">
               <a:lnSpc>
-                <a:spcPts val="997"/>
+                <a:spcPts val="1022"/>
               </a:lnSpc>
               <a:spcBef>
                 <a:spcPts val="0"/>
@@ -5561,8 +5561,8 @@
         </p:nvSpPr>
         <p:spPr>
           <a:xfrm>
-            <a:off x="3897920" y="2255986"/>
-            <a:ext cx="2315535" cy="289956"/>
+            <a:off x="3897920" y="2265065"/>
+            <a:ext cx="2315535" cy="296290"/>
           </a:xfrm>
           <a:prstGeom prst="rect">
             <a:avLst/>
@@ -5599,7 +5599,7 @@
           <a:p>
             <a:pPr algn="ctr">
               <a:lnSpc>
-                <a:spcPts val="997"/>
+                <a:spcPts val="1022"/>
               </a:lnSpc>
               <a:spcBef>
                 <a:spcPts val="0"/>
@@ -5664,8 +5664,8 @@
         </p:nvSpPr>
         <p:spPr>
           <a:xfrm>
-            <a:off x="6213455" y="2255986"/>
-            <a:ext cx="514563" cy="289956"/>
+            <a:off x="6213455" y="2265065"/>
+            <a:ext cx="514563" cy="296290"/>
           </a:xfrm>
           <a:prstGeom prst="rect">
             <a:avLst/>
@@ -5702,7 +5702,7 @@
           <a:p>
             <a:pPr algn="ctr">
               <a:lnSpc>
-                <a:spcPts val="997"/>
+                <a:spcPts val="1022"/>
               </a:lnSpc>
               <a:spcBef>
                 <a:spcPts val="0"/>
@@ -5722,8 +5722,8 @@
         </p:nvSpPr>
         <p:spPr>
           <a:xfrm>
-            <a:off x="6728018" y="2255986"/>
-            <a:ext cx="514563" cy="289956"/>
+            <a:off x="6728018" y="2265065"/>
+            <a:ext cx="514563" cy="296290"/>
           </a:xfrm>
           <a:prstGeom prst="rect">
             <a:avLst/>
@@ -5760,7 +5760,7 @@
           <a:p>
             <a:pPr algn="ctr">
               <a:lnSpc>
-                <a:spcPts val="997"/>
+                <a:spcPts val="1022"/>
               </a:lnSpc>
               <a:spcBef>
                 <a:spcPts val="0"/>
@@ -5789,8 +5789,8 @@
         </p:nvSpPr>
         <p:spPr>
           <a:xfrm>
-            <a:off x="7242581" y="2255986"/>
-            <a:ext cx="643204" cy="289956"/>
+            <a:off x="7242581" y="2265065"/>
+            <a:ext cx="643204" cy="296290"/>
           </a:xfrm>
           <a:prstGeom prst="rect">
             <a:avLst/>
@@ -5827,7 +5827,7 @@
           <a:p>
             <a:pPr algn="ctr">
               <a:lnSpc>
-                <a:spcPts val="997"/>
+                <a:spcPts val="1022"/>
               </a:lnSpc>
               <a:spcBef>
                 <a:spcPts val="0"/>
@@ -5849,7 +5849,7 @@
           <a:p>
             <a:pPr algn="ctr">
               <a:lnSpc>
-                <a:spcPts val="997"/>
+                <a:spcPts val="1022"/>
               </a:lnSpc>
               <a:spcBef>
                 <a:spcPts val="0"/>
@@ -5887,8 +5887,8 @@
         </p:nvSpPr>
         <p:spPr>
           <a:xfrm>
-            <a:off x="7885785" y="2255986"/>
-            <a:ext cx="643204" cy="289956"/>
+            <a:off x="7885785" y="2265065"/>
+            <a:ext cx="643204" cy="296290"/>
           </a:xfrm>
           <a:prstGeom prst="rect">
             <a:avLst/>
@@ -5925,7 +5925,7 @@
           <a:p>
             <a:pPr algn="ctr">
               <a:lnSpc>
-                <a:spcPts val="997"/>
+                <a:spcPts val="1022"/>
               </a:lnSpc>
               <a:spcBef>
                 <a:spcPts val="0"/>
@@ -5947,7 +5947,7 @@
           <a:p>
             <a:pPr algn="ctr">
               <a:lnSpc>
-                <a:spcPts val="997"/>
+                <a:spcPts val="1022"/>
               </a:lnSpc>
               <a:spcBef>
                 <a:spcPts val="0"/>
@@ -5985,8 +5985,8 @@
         </p:nvSpPr>
         <p:spPr>
           <a:xfrm>
-            <a:off x="8528989" y="2255986"/>
-            <a:ext cx="643205" cy="289956"/>
+            <a:off x="8528989" y="2265065"/>
+            <a:ext cx="643205" cy="296290"/>
           </a:xfrm>
           <a:prstGeom prst="rect">
             <a:avLst/>
@@ -6023,7 +6023,7 @@
           <a:p>
             <a:pPr algn="ctr">
               <a:lnSpc>
-                <a:spcPts val="997"/>
+                <a:spcPts val="1022"/>
               </a:lnSpc>
               <a:spcBef>
                 <a:spcPts val="0"/>
@@ -6054,7 +6054,7 @@
           <a:p>
             <a:pPr algn="ctr">
               <a:lnSpc>
-                <a:spcPts val="997"/>
+                <a:spcPts val="1022"/>
               </a:lnSpc>
               <a:spcBef>
                 <a:spcPts val="0"/>
@@ -6083,8 +6083,8 @@
         </p:nvSpPr>
         <p:spPr>
           <a:xfrm>
-            <a:off x="2740152" y="2545942"/>
-            <a:ext cx="1157768" cy="655920"/>
+            <a:off x="2740152" y="2561355"/>
+            <a:ext cx="1157768" cy="653028"/>
           </a:xfrm>
           <a:prstGeom prst="rect">
             <a:avLst/>
@@ -6121,7 +6121,7 @@
           <a:p>
             <a:pPr algn="l">
               <a:lnSpc>
-                <a:spcPts val="997"/>
+                <a:spcPts val="1022"/>
               </a:lnSpc>
               <a:spcBef>
                 <a:spcPts val="0"/>
@@ -6159,8 +6159,8 @@
         </p:nvSpPr>
         <p:spPr>
           <a:xfrm>
-            <a:off x="3897920" y="2545942"/>
-            <a:ext cx="2315535" cy="218640"/>
+            <a:off x="3897920" y="2561355"/>
+            <a:ext cx="2315535" cy="217676"/>
           </a:xfrm>
           <a:prstGeom prst="rect">
             <a:avLst/>
@@ -6197,7 +6197,7 @@
           <a:p>
             <a:pPr algn="l">
               <a:lnSpc>
-                <a:spcPts val="997"/>
+                <a:spcPts val="1022"/>
               </a:lnSpc>
               <a:spcBef>
                 <a:spcPts val="0"/>
@@ -6253,8 +6253,8 @@
         </p:nvSpPr>
         <p:spPr>
           <a:xfrm>
-            <a:off x="6213455" y="2545942"/>
-            <a:ext cx="514563" cy="218640"/>
+            <a:off x="6213455" y="2561355"/>
+            <a:ext cx="514563" cy="217676"/>
           </a:xfrm>
           <a:prstGeom prst="rect">
             <a:avLst/>
@@ -6299,8 +6299,8 @@
         </p:nvSpPr>
         <p:spPr>
           <a:xfrm>
-            <a:off x="6376671" y="2587345"/>
-            <a:ext cx="188130" cy="135834"/>
+            <a:off x="6376671" y="2600692"/>
+            <a:ext cx="188130" cy="139001"/>
           </a:xfrm>
           <a:prstGeom prst="roundRect">
             <a:avLst>
@@ -6363,8 +6363,8 @@
         </p:nvSpPr>
         <p:spPr>
           <a:xfrm>
-            <a:off x="6728018" y="2545942"/>
-            <a:ext cx="514563" cy="218640"/>
+            <a:off x="6728018" y="2561355"/>
+            <a:ext cx="514563" cy="217676"/>
           </a:xfrm>
           <a:prstGeom prst="rect">
             <a:avLst/>
@@ -6401,7 +6401,7 @@
           <a:p>
             <a:pPr algn="r">
               <a:lnSpc>
-                <a:spcPts val="997"/>
+                <a:spcPts val="1022"/>
               </a:lnSpc>
               <a:spcBef>
                 <a:spcPts val="0"/>
@@ -6430,8 +6430,8 @@
         </p:nvSpPr>
         <p:spPr>
           <a:xfrm>
-            <a:off x="7242581" y="2545942"/>
-            <a:ext cx="643204" cy="218640"/>
+            <a:off x="7242581" y="2561355"/>
+            <a:ext cx="643204" cy="217676"/>
           </a:xfrm>
           <a:prstGeom prst="rect">
             <a:avLst/>
@@ -6468,7 +6468,7 @@
           <a:p>
             <a:pPr algn="ctr">
               <a:lnSpc>
-                <a:spcPts val="997"/>
+                <a:spcPts val="1022"/>
               </a:lnSpc>
               <a:spcBef>
                 <a:spcPts val="0"/>
@@ -6497,8 +6497,8 @@
         </p:nvSpPr>
         <p:spPr>
           <a:xfrm>
-            <a:off x="7885785" y="2545942"/>
-            <a:ext cx="643204" cy="218640"/>
+            <a:off x="7885785" y="2561355"/>
+            <a:ext cx="643204" cy="217676"/>
           </a:xfrm>
           <a:prstGeom prst="rect">
             <a:avLst/>
@@ -6535,7 +6535,7 @@
           <a:p>
             <a:pPr algn="ctr">
               <a:lnSpc>
-                <a:spcPts val="997"/>
+                <a:spcPts val="1022"/>
               </a:lnSpc>
               <a:spcBef>
                 <a:spcPts val="0"/>
@@ -6564,8 +6564,8 @@
         </p:nvSpPr>
         <p:spPr>
           <a:xfrm>
-            <a:off x="8528989" y="2545942"/>
-            <a:ext cx="643205" cy="218640"/>
+            <a:off x="8528989" y="2561355"/>
+            <a:ext cx="643205" cy="217676"/>
           </a:xfrm>
           <a:prstGeom prst="rect">
             <a:avLst/>
@@ -6602,7 +6602,7 @@
           <a:p>
             <a:pPr algn="ctr">
               <a:lnSpc>
-                <a:spcPts val="997"/>
+                <a:spcPts val="1022"/>
               </a:lnSpc>
               <a:spcBef>
                 <a:spcPts val="0"/>
@@ -6631,8 +6631,8 @@
         </p:nvSpPr>
         <p:spPr>
           <a:xfrm>
-            <a:off x="3897920" y="2764582"/>
-            <a:ext cx="2315535" cy="218640"/>
+            <a:off x="3897920" y="2779031"/>
+            <a:ext cx="2315535" cy="217676"/>
           </a:xfrm>
           <a:prstGeom prst="rect">
             <a:avLst/>
@@ -6669,7 +6669,7 @@
           <a:p>
             <a:pPr algn="l">
               <a:lnSpc>
-                <a:spcPts val="997"/>
+                <a:spcPts val="1022"/>
               </a:lnSpc>
               <a:spcBef>
                 <a:spcPts val="0"/>
@@ -6698,8 +6698,8 @@
         </p:nvSpPr>
         <p:spPr>
           <a:xfrm>
-            <a:off x="6213455" y="2764582"/>
-            <a:ext cx="514563" cy="218640"/>
+            <a:off x="6213455" y="2779031"/>
+            <a:ext cx="514563" cy="217676"/>
           </a:xfrm>
           <a:prstGeom prst="rect">
             <a:avLst/>
@@ -6744,8 +6744,8 @@
         </p:nvSpPr>
         <p:spPr>
           <a:xfrm>
-            <a:off x="6376671" y="2805985"/>
-            <a:ext cx="188130" cy="135834"/>
+            <a:off x="6376671" y="2818368"/>
+            <a:ext cx="188130" cy="139001"/>
           </a:xfrm>
           <a:prstGeom prst="roundRect">
             <a:avLst>
@@ -6808,8 +6808,8 @@
         </p:nvSpPr>
         <p:spPr>
           <a:xfrm>
-            <a:off x="6728018" y="2764582"/>
-            <a:ext cx="514563" cy="218640"/>
+            <a:off x="6728018" y="2779031"/>
+            <a:ext cx="514563" cy="217676"/>
           </a:xfrm>
           <a:prstGeom prst="rect">
             <a:avLst/>
@@ -6846,7 +6846,7 @@
           <a:p>
             <a:pPr algn="r">
               <a:lnSpc>
-                <a:spcPts val="997"/>
+                <a:spcPts val="1022"/>
               </a:lnSpc>
               <a:spcBef>
                 <a:spcPts val="0"/>
@@ -6875,8 +6875,8 @@
         </p:nvSpPr>
         <p:spPr>
           <a:xfrm>
-            <a:off x="7242581" y="2764582"/>
-            <a:ext cx="643204" cy="218640"/>
+            <a:off x="7242581" y="2779031"/>
+            <a:ext cx="643204" cy="217676"/>
           </a:xfrm>
           <a:prstGeom prst="rect">
             <a:avLst/>
@@ -6913,7 +6913,7 @@
           <a:p>
             <a:pPr algn="ctr">
               <a:lnSpc>
-                <a:spcPts val="997"/>
+                <a:spcPts val="1022"/>
               </a:lnSpc>
               <a:spcBef>
                 <a:spcPts val="0"/>
@@ -6942,8 +6942,8 @@
         </p:nvSpPr>
         <p:spPr>
           <a:xfrm>
-            <a:off x="7885785" y="2764582"/>
-            <a:ext cx="643204" cy="218640"/>
+            <a:off x="7885785" y="2779031"/>
+            <a:ext cx="643204" cy="217676"/>
           </a:xfrm>
           <a:prstGeom prst="rect">
             <a:avLst/>
@@ -6980,7 +6980,7 @@
           <a:p>
             <a:pPr algn="ctr">
               <a:lnSpc>
-                <a:spcPts val="997"/>
+                <a:spcPts val="1022"/>
               </a:lnSpc>
               <a:spcBef>
                 <a:spcPts val="0"/>
@@ -7009,8 +7009,8 @@
         </p:nvSpPr>
         <p:spPr>
           <a:xfrm>
-            <a:off x="8528989" y="2764582"/>
-            <a:ext cx="643205" cy="218640"/>
+            <a:off x="8528989" y="2779031"/>
+            <a:ext cx="643205" cy="217676"/>
           </a:xfrm>
           <a:prstGeom prst="rect">
             <a:avLst/>
@@ -7047,7 +7047,7 @@
           <a:p>
             <a:pPr algn="ctr">
               <a:lnSpc>
-                <a:spcPts val="997"/>
+                <a:spcPts val="1022"/>
               </a:lnSpc>
               <a:spcBef>
                 <a:spcPts val="0"/>
@@ -7076,8 +7076,8 @@
         </p:nvSpPr>
         <p:spPr>
           <a:xfrm>
-            <a:off x="3897920" y="2983222"/>
-            <a:ext cx="2315535" cy="218640"/>
+            <a:off x="3897920" y="2996707"/>
+            <a:ext cx="2315535" cy="217676"/>
           </a:xfrm>
           <a:prstGeom prst="rect">
             <a:avLst/>
@@ -7114,7 +7114,7 @@
           <a:p>
             <a:pPr algn="l">
               <a:lnSpc>
-                <a:spcPts val="997"/>
+                <a:spcPts val="1022"/>
               </a:lnSpc>
               <a:spcBef>
                 <a:spcPts val="0"/>
@@ -7179,8 +7179,8 @@
         </p:nvSpPr>
         <p:spPr>
           <a:xfrm>
-            <a:off x="6213455" y="2983222"/>
-            <a:ext cx="514563" cy="218640"/>
+            <a:off x="6213455" y="2996707"/>
+            <a:ext cx="514563" cy="217676"/>
           </a:xfrm>
           <a:prstGeom prst="rect">
             <a:avLst/>
@@ -7225,8 +7225,8 @@
         </p:nvSpPr>
         <p:spPr>
           <a:xfrm>
-            <a:off x="6376671" y="3024625"/>
-            <a:ext cx="188130" cy="135834"/>
+            <a:off x="6376671" y="3036044"/>
+            <a:ext cx="188130" cy="139001"/>
           </a:xfrm>
           <a:prstGeom prst="roundRect">
             <a:avLst>
@@ -7289,8 +7289,8 @@
         </p:nvSpPr>
         <p:spPr>
           <a:xfrm>
-            <a:off x="6728018" y="2983222"/>
-            <a:ext cx="514563" cy="218640"/>
+            <a:off x="6728018" y="2996707"/>
+            <a:ext cx="514563" cy="217676"/>
           </a:xfrm>
           <a:prstGeom prst="rect">
             <a:avLst/>
@@ -7327,7 +7327,7 @@
           <a:p>
             <a:pPr algn="r">
               <a:lnSpc>
-                <a:spcPts val="997"/>
+                <a:spcPts val="1022"/>
               </a:lnSpc>
               <a:spcBef>
                 <a:spcPts val="0"/>
@@ -7356,8 +7356,8 @@
         </p:nvSpPr>
         <p:spPr>
           <a:xfrm>
-            <a:off x="7242581" y="2983222"/>
-            <a:ext cx="643204" cy="218640"/>
+            <a:off x="7242581" y="2996707"/>
+            <a:ext cx="643204" cy="217676"/>
           </a:xfrm>
           <a:prstGeom prst="rect">
             <a:avLst/>
@@ -7394,7 +7394,7 @@
           <a:p>
             <a:pPr algn="ctr">
               <a:lnSpc>
-                <a:spcPts val="997"/>
+                <a:spcPts val="1022"/>
               </a:lnSpc>
               <a:spcBef>
                 <a:spcPts val="0"/>
@@ -7423,8 +7423,8 @@
         </p:nvSpPr>
         <p:spPr>
           <a:xfrm>
-            <a:off x="7885785" y="2983222"/>
-            <a:ext cx="643204" cy="218640"/>
+            <a:off x="7885785" y="2996707"/>
+            <a:ext cx="643204" cy="217676"/>
           </a:xfrm>
           <a:prstGeom prst="rect">
             <a:avLst/>
@@ -7461,7 +7461,7 @@
           <a:p>
             <a:pPr algn="ctr">
               <a:lnSpc>
-                <a:spcPts val="997"/>
+                <a:spcPts val="1022"/>
               </a:lnSpc>
               <a:spcBef>
                 <a:spcPts val="0"/>
@@ -7490,8 +7490,8 @@
         </p:nvSpPr>
         <p:spPr>
           <a:xfrm>
-            <a:off x="8528989" y="2983222"/>
-            <a:ext cx="643205" cy="218640"/>
+            <a:off x="8528989" y="2996707"/>
+            <a:ext cx="643205" cy="217676"/>
           </a:xfrm>
           <a:prstGeom prst="rect">
             <a:avLst/>
@@ -7528,7 +7528,7 @@
           <a:p>
             <a:pPr algn="ctr">
               <a:lnSpc>
-                <a:spcPts val="997"/>
+                <a:spcPts val="1022"/>
               </a:lnSpc>
               <a:spcBef>
                 <a:spcPts val="0"/>
@@ -7557,8 +7557,8 @@
         </p:nvSpPr>
         <p:spPr>
           <a:xfrm>
-            <a:off x="2740152" y="3201862"/>
-            <a:ext cx="1157768" cy="655920"/>
+            <a:off x="2740152" y="3214383"/>
+            <a:ext cx="1157768" cy="653028"/>
           </a:xfrm>
           <a:prstGeom prst="rect">
             <a:avLst/>
@@ -7595,7 +7595,7 @@
           <a:p>
             <a:pPr algn="l">
               <a:lnSpc>
-                <a:spcPts val="997"/>
+                <a:spcPts val="1022"/>
               </a:lnSpc>
               <a:spcBef>
                 <a:spcPts val="0"/>
@@ -7633,8 +7633,8 @@
         </p:nvSpPr>
         <p:spPr>
           <a:xfrm>
-            <a:off x="3897920" y="3201862"/>
-            <a:ext cx="2315535" cy="218640"/>
+            <a:off x="3897920" y="3214383"/>
+            <a:ext cx="2315535" cy="217676"/>
           </a:xfrm>
           <a:prstGeom prst="rect">
             <a:avLst/>
@@ -7671,7 +7671,7 @@
           <a:p>
             <a:pPr algn="l">
               <a:lnSpc>
-                <a:spcPts val="997"/>
+                <a:spcPts val="1022"/>
               </a:lnSpc>
               <a:spcBef>
                 <a:spcPts val="0"/>
@@ -7736,8 +7736,8 @@
         </p:nvSpPr>
         <p:spPr>
           <a:xfrm>
-            <a:off x="6213455" y="3201862"/>
-            <a:ext cx="514563" cy="218640"/>
+            <a:off x="6213455" y="3214383"/>
+            <a:ext cx="514563" cy="217676"/>
           </a:xfrm>
           <a:prstGeom prst="rect">
             <a:avLst/>
@@ -7782,8 +7782,8 @@
         </p:nvSpPr>
         <p:spPr>
           <a:xfrm>
-            <a:off x="6376671" y="3243265"/>
-            <a:ext cx="188130" cy="135834"/>
+            <a:off x="6376671" y="3253720"/>
+            <a:ext cx="188130" cy="139001"/>
           </a:xfrm>
           <a:prstGeom prst="roundRect">
             <a:avLst>
@@ -7846,8 +7846,8 @@
         </p:nvSpPr>
         <p:spPr>
           <a:xfrm>
-            <a:off x="6728018" y="3201862"/>
-            <a:ext cx="514563" cy="218640"/>
+            <a:off x="6728018" y="3214383"/>
+            <a:ext cx="514563" cy="217676"/>
           </a:xfrm>
           <a:prstGeom prst="rect">
             <a:avLst/>
@@ -7884,7 +7884,7 @@
           <a:p>
             <a:pPr algn="r">
               <a:lnSpc>
-                <a:spcPts val="997"/>
+                <a:spcPts val="1022"/>
               </a:lnSpc>
               <a:spcBef>
                 <a:spcPts val="0"/>
@@ -7913,8 +7913,8 @@
         </p:nvSpPr>
         <p:spPr>
           <a:xfrm>
-            <a:off x="7242581" y="3201862"/>
-            <a:ext cx="643204" cy="218640"/>
+            <a:off x="7242581" y="3214383"/>
+            <a:ext cx="643204" cy="217676"/>
           </a:xfrm>
           <a:prstGeom prst="rect">
             <a:avLst/>
@@ -7951,7 +7951,7 @@
           <a:p>
             <a:pPr algn="ctr">
               <a:lnSpc>
-                <a:spcPts val="997"/>
+                <a:spcPts val="1022"/>
               </a:lnSpc>
               <a:spcBef>
                 <a:spcPts val="0"/>
@@ -7980,8 +7980,8 @@
         </p:nvSpPr>
         <p:spPr>
           <a:xfrm>
-            <a:off x="7885785" y="3201862"/>
-            <a:ext cx="643204" cy="218640"/>
+            <a:off x="7885785" y="3214383"/>
+            <a:ext cx="643204" cy="217676"/>
           </a:xfrm>
           <a:prstGeom prst="rect">
             <a:avLst/>
@@ -8018,7 +8018,7 @@
           <a:p>
             <a:pPr algn="ctr">
               <a:lnSpc>
-                <a:spcPts val="997"/>
+                <a:spcPts val="1022"/>
               </a:lnSpc>
               <a:spcBef>
                 <a:spcPts val="0"/>
@@ -8047,8 +8047,8 @@
         </p:nvSpPr>
         <p:spPr>
           <a:xfrm>
-            <a:off x="8528989" y="3201862"/>
-            <a:ext cx="643205" cy="218640"/>
+            <a:off x="8528989" y="3214383"/>
+            <a:ext cx="643205" cy="217676"/>
           </a:xfrm>
           <a:prstGeom prst="rect">
             <a:avLst/>
@@ -8085,7 +8085,7 @@
           <a:p>
             <a:pPr algn="ctr">
               <a:lnSpc>
-                <a:spcPts val="997"/>
+                <a:spcPts val="1022"/>
               </a:lnSpc>
               <a:spcBef>
                 <a:spcPts val="0"/>
@@ -8114,8 +8114,8 @@
         </p:nvSpPr>
         <p:spPr>
           <a:xfrm>
-            <a:off x="3897920" y="3420502"/>
-            <a:ext cx="2315535" cy="218640"/>
+            <a:off x="3897920" y="3432059"/>
+            <a:ext cx="2315535" cy="217676"/>
           </a:xfrm>
           <a:prstGeom prst="rect">
             <a:avLst/>
@@ -8152,7 +8152,7 @@
           <a:p>
             <a:pPr algn="l">
               <a:lnSpc>
-                <a:spcPts val="997"/>
+                <a:spcPts val="1022"/>
               </a:lnSpc>
               <a:spcBef>
                 <a:spcPts val="0"/>
@@ -8235,8 +8235,8 @@
         </p:nvSpPr>
         <p:spPr>
           <a:xfrm>
-            <a:off x="6213455" y="3420502"/>
-            <a:ext cx="514563" cy="218640"/>
+            <a:off x="6213455" y="3432059"/>
+            <a:ext cx="514563" cy="217676"/>
           </a:xfrm>
           <a:prstGeom prst="rect">
             <a:avLst/>
@@ -8281,8 +8281,8 @@
         </p:nvSpPr>
         <p:spPr>
           <a:xfrm>
-            <a:off x="6376671" y="3461905"/>
-            <a:ext cx="188130" cy="135834"/>
+            <a:off x="6376671" y="3471396"/>
+            <a:ext cx="188130" cy="139001"/>
           </a:xfrm>
           <a:prstGeom prst="roundRect">
             <a:avLst>
@@ -8345,8 +8345,8 @@
         </p:nvSpPr>
         <p:spPr>
           <a:xfrm>
-            <a:off x="6728018" y="3420502"/>
-            <a:ext cx="514563" cy="218640"/>
+            <a:off x="6728018" y="3432059"/>
+            <a:ext cx="514563" cy="217676"/>
           </a:xfrm>
           <a:prstGeom prst="rect">
             <a:avLst/>
@@ -8383,7 +8383,7 @@
           <a:p>
             <a:pPr algn="r">
               <a:lnSpc>
-                <a:spcPts val="997"/>
+                <a:spcPts val="1022"/>
               </a:lnSpc>
               <a:spcBef>
                 <a:spcPts val="0"/>
@@ -8412,8 +8412,8 @@
         </p:nvSpPr>
         <p:spPr>
           <a:xfrm>
-            <a:off x="7242581" y="3420502"/>
-            <a:ext cx="643204" cy="218640"/>
+            <a:off x="7242581" y="3432059"/>
+            <a:ext cx="643204" cy="217676"/>
           </a:xfrm>
           <a:prstGeom prst="rect">
             <a:avLst/>
@@ -8450,7 +8450,7 @@
           <a:p>
             <a:pPr algn="ctr">
               <a:lnSpc>
-                <a:spcPts val="997"/>
+                <a:spcPts val="1022"/>
               </a:lnSpc>
               <a:spcBef>
                 <a:spcPts val="0"/>
@@ -8479,8 +8479,8 @@
         </p:nvSpPr>
         <p:spPr>
           <a:xfrm>
-            <a:off x="7885785" y="3420502"/>
-            <a:ext cx="643204" cy="218640"/>
+            <a:off x="7885785" y="3432059"/>
+            <a:ext cx="643204" cy="217676"/>
           </a:xfrm>
           <a:prstGeom prst="rect">
             <a:avLst/>
@@ -8517,7 +8517,7 @@
           <a:p>
             <a:pPr algn="ctr">
               <a:lnSpc>
-                <a:spcPts val="997"/>
+                <a:spcPts val="1022"/>
               </a:lnSpc>
               <a:spcBef>
                 <a:spcPts val="0"/>
@@ -8546,8 +8546,8 @@
         </p:nvSpPr>
         <p:spPr>
           <a:xfrm>
-            <a:off x="8528989" y="3420502"/>
-            <a:ext cx="643205" cy="218640"/>
+            <a:off x="8528989" y="3432059"/>
+            <a:ext cx="643205" cy="217676"/>
           </a:xfrm>
           <a:prstGeom prst="rect">
             <a:avLst/>
@@ -8584,7 +8584,7 @@
           <a:p>
             <a:pPr algn="ctr">
               <a:lnSpc>
-                <a:spcPts val="997"/>
+                <a:spcPts val="1022"/>
               </a:lnSpc>
               <a:spcBef>
                 <a:spcPts val="0"/>
@@ -8613,8 +8613,8 @@
         </p:nvSpPr>
         <p:spPr>
           <a:xfrm>
-            <a:off x="3897920" y="3639142"/>
-            <a:ext cx="2315535" cy="218640"/>
+            <a:off x="3897920" y="3649735"/>
+            <a:ext cx="2315535" cy="217676"/>
           </a:xfrm>
           <a:prstGeom prst="rect">
             <a:avLst/>
@@ -8651,7 +8651,7 @@
           <a:p>
             <a:pPr algn="l">
               <a:lnSpc>
-                <a:spcPts val="997"/>
+                <a:spcPts val="1022"/>
               </a:lnSpc>
               <a:spcBef>
                 <a:spcPts val="0"/>
@@ -8734,8 +8734,8 @@
         </p:nvSpPr>
         <p:spPr>
           <a:xfrm>
-            <a:off x="6213455" y="3639142"/>
-            <a:ext cx="514563" cy="218640"/>
+            <a:off x="6213455" y="3649735"/>
+            <a:ext cx="514563" cy="217676"/>
           </a:xfrm>
           <a:prstGeom prst="rect">
             <a:avLst/>
@@ -8780,8 +8780,8 @@
         </p:nvSpPr>
         <p:spPr>
           <a:xfrm>
-            <a:off x="6376671" y="3680545"/>
-            <a:ext cx="188130" cy="135834"/>
+            <a:off x="6376671" y="3689072"/>
+            <a:ext cx="188130" cy="139001"/>
           </a:xfrm>
           <a:prstGeom prst="roundRect">
             <a:avLst>
@@ -8844,8 +8844,8 @@
         </p:nvSpPr>
         <p:spPr>
           <a:xfrm>
-            <a:off x="6728018" y="3639142"/>
-            <a:ext cx="514563" cy="218640"/>
+            <a:off x="6728018" y="3649735"/>
+            <a:ext cx="514563" cy="217676"/>
           </a:xfrm>
           <a:prstGeom prst="rect">
             <a:avLst/>
@@ -8882,7 +8882,7 @@
           <a:p>
             <a:pPr algn="r">
               <a:lnSpc>
-                <a:spcPts val="997"/>
+                <a:spcPts val="1022"/>
               </a:lnSpc>
               <a:spcBef>
                 <a:spcPts val="0"/>
@@ -8911,8 +8911,8 @@
         </p:nvSpPr>
         <p:spPr>
           <a:xfrm>
-            <a:off x="7242581" y="3639142"/>
-            <a:ext cx="643204" cy="218640"/>
+            <a:off x="7242581" y="3649735"/>
+            <a:ext cx="643204" cy="217676"/>
           </a:xfrm>
           <a:prstGeom prst="rect">
             <a:avLst/>
@@ -8949,7 +8949,7 @@
           <a:p>
             <a:pPr algn="ctr">
               <a:lnSpc>
-                <a:spcPts val="997"/>
+                <a:spcPts val="1022"/>
               </a:lnSpc>
               <a:spcBef>
                 <a:spcPts val="0"/>
@@ -8978,8 +8978,8 @@
         </p:nvSpPr>
         <p:spPr>
           <a:xfrm>
-            <a:off x="7885785" y="3639142"/>
-            <a:ext cx="643204" cy="218640"/>
+            <a:off x="7885785" y="3649735"/>
+            <a:ext cx="643204" cy="217676"/>
           </a:xfrm>
           <a:prstGeom prst="rect">
             <a:avLst/>
@@ -9016,7 +9016,7 @@
           <a:p>
             <a:pPr algn="ctr">
               <a:lnSpc>
-                <a:spcPts val="997"/>
+                <a:spcPts val="1022"/>
               </a:lnSpc>
               <a:spcBef>
                 <a:spcPts val="0"/>
@@ -9045,8 +9045,8 @@
         </p:nvSpPr>
         <p:spPr>
           <a:xfrm>
-            <a:off x="8528989" y="3639142"/>
-            <a:ext cx="643205" cy="218640"/>
+            <a:off x="8528989" y="3649735"/>
+            <a:ext cx="643205" cy="217676"/>
           </a:xfrm>
           <a:prstGeom prst="rect">
             <a:avLst/>
@@ -9083,7 +9083,7 @@
           <a:p>
             <a:pPr algn="ctr">
               <a:lnSpc>
-                <a:spcPts val="997"/>
+                <a:spcPts val="1022"/>
               </a:lnSpc>
               <a:spcBef>
                 <a:spcPts val="0"/>
@@ -9112,8 +9112,8 @@
         </p:nvSpPr>
         <p:spPr>
           <a:xfrm>
-            <a:off x="2740152" y="3857782"/>
-            <a:ext cx="1157768" cy="655920"/>
+            <a:off x="2740152" y="3867411"/>
+            <a:ext cx="1157768" cy="653028"/>
           </a:xfrm>
           <a:prstGeom prst="rect">
             <a:avLst/>
@@ -9150,7 +9150,7 @@
           <a:p>
             <a:pPr algn="l">
               <a:lnSpc>
-                <a:spcPts val="997"/>
+                <a:spcPts val="1022"/>
               </a:lnSpc>
               <a:spcBef>
                 <a:spcPts val="0"/>
@@ -9197,8 +9197,8 @@
         </p:nvSpPr>
         <p:spPr>
           <a:xfrm>
-            <a:off x="3897920" y="3857782"/>
-            <a:ext cx="2315535" cy="218640"/>
+            <a:off x="3897920" y="3867411"/>
+            <a:ext cx="2315535" cy="217676"/>
           </a:xfrm>
           <a:prstGeom prst="rect">
             <a:avLst/>
@@ -9235,7 +9235,7 @@
           <a:p>
             <a:pPr algn="l">
               <a:lnSpc>
-                <a:spcPts val="997"/>
+                <a:spcPts val="1022"/>
               </a:lnSpc>
               <a:spcBef>
                 <a:spcPts val="0"/>
@@ -9273,8 +9273,8 @@
         </p:nvSpPr>
         <p:spPr>
           <a:xfrm>
-            <a:off x="6213455" y="3857782"/>
-            <a:ext cx="514563" cy="218640"/>
+            <a:off x="6213455" y="3867411"/>
+            <a:ext cx="514563" cy="217676"/>
           </a:xfrm>
           <a:prstGeom prst="rect">
             <a:avLst/>
@@ -9319,8 +9319,8 @@
         </p:nvSpPr>
         <p:spPr>
           <a:xfrm>
-            <a:off x="6352580" y="3899185"/>
-            <a:ext cx="236313" cy="135834"/>
+            <a:off x="6352580" y="3906748"/>
+            <a:ext cx="236313" cy="139001"/>
           </a:xfrm>
           <a:prstGeom prst="roundRect">
             <a:avLst>
@@ -9383,8 +9383,8 @@
         </p:nvSpPr>
         <p:spPr>
           <a:xfrm>
-            <a:off x="6728018" y="3857782"/>
-            <a:ext cx="514563" cy="218640"/>
+            <a:off x="6728018" y="3867411"/>
+            <a:ext cx="514563" cy="217676"/>
           </a:xfrm>
           <a:prstGeom prst="rect">
             <a:avLst/>
@@ -9421,7 +9421,7 @@
           <a:p>
             <a:pPr algn="r">
               <a:lnSpc>
-                <a:spcPts val="997"/>
+                <a:spcPts val="1022"/>
               </a:lnSpc>
               <a:spcBef>
                 <a:spcPts val="0"/>
@@ -9450,8 +9450,8 @@
         </p:nvSpPr>
         <p:spPr>
           <a:xfrm>
-            <a:off x="7242581" y="3857782"/>
-            <a:ext cx="643204" cy="218640"/>
+            <a:off x="7242581" y="3867411"/>
+            <a:ext cx="643204" cy="217676"/>
           </a:xfrm>
           <a:prstGeom prst="rect">
             <a:avLst/>
@@ -9488,7 +9488,7 @@
           <a:p>
             <a:pPr algn="ctr">
               <a:lnSpc>
-                <a:spcPts val="997"/>
+                <a:spcPts val="1022"/>
               </a:lnSpc>
               <a:spcBef>
                 <a:spcPts val="0"/>
@@ -9517,8 +9517,8 @@
         </p:nvSpPr>
         <p:spPr>
           <a:xfrm>
-            <a:off x="7885785" y="3857782"/>
-            <a:ext cx="643204" cy="218640"/>
+            <a:off x="7885785" y="3867411"/>
+            <a:ext cx="643204" cy="217676"/>
           </a:xfrm>
           <a:prstGeom prst="rect">
             <a:avLst/>
@@ -9555,7 +9555,7 @@
           <a:p>
             <a:pPr algn="ctr">
               <a:lnSpc>
-                <a:spcPts val="997"/>
+                <a:spcPts val="1022"/>
               </a:lnSpc>
               <a:spcBef>
                 <a:spcPts val="0"/>
@@ -9584,8 +9584,8 @@
         </p:nvSpPr>
         <p:spPr>
           <a:xfrm>
-            <a:off x="8528989" y="3857782"/>
-            <a:ext cx="643205" cy="218640"/>
+            <a:off x="8528989" y="3867411"/>
+            <a:ext cx="643205" cy="217676"/>
           </a:xfrm>
           <a:prstGeom prst="rect">
             <a:avLst/>
@@ -9622,7 +9622,7 @@
           <a:p>
             <a:pPr algn="ctr">
               <a:lnSpc>
-                <a:spcPts val="997"/>
+                <a:spcPts val="1022"/>
               </a:lnSpc>
               <a:spcBef>
                 <a:spcPts val="0"/>
@@ -9651,8 +9651,8 @@
         </p:nvSpPr>
         <p:spPr>
           <a:xfrm>
-            <a:off x="3897920" y="4076422"/>
-            <a:ext cx="2315535" cy="218640"/>
+            <a:off x="3897920" y="4085087"/>
+            <a:ext cx="2315535" cy="217676"/>
           </a:xfrm>
           <a:prstGeom prst="rect">
             <a:avLst/>
@@ -9689,7 +9689,7 @@
           <a:p>
             <a:pPr algn="l">
               <a:lnSpc>
-                <a:spcPts val="997"/>
+                <a:spcPts val="1022"/>
               </a:lnSpc>
               <a:spcBef>
                 <a:spcPts val="0"/>
@@ -9727,8 +9727,8 @@
         </p:nvSpPr>
         <p:spPr>
           <a:xfrm>
-            <a:off x="6213455" y="4076422"/>
-            <a:ext cx="514563" cy="218640"/>
+            <a:off x="6213455" y="4085087"/>
+            <a:ext cx="514563" cy="217676"/>
           </a:xfrm>
           <a:prstGeom prst="rect">
             <a:avLst/>
@@ -9773,8 +9773,8 @@
         </p:nvSpPr>
         <p:spPr>
           <a:xfrm>
-            <a:off x="6351417" y="4117825"/>
-            <a:ext cx="238638" cy="135834"/>
+            <a:off x="6351417" y="4124424"/>
+            <a:ext cx="238638" cy="139001"/>
           </a:xfrm>
           <a:prstGeom prst="roundRect">
             <a:avLst>
@@ -9837,8 +9837,8 @@
         </p:nvSpPr>
         <p:spPr>
           <a:xfrm>
-            <a:off x="6728018" y="4076422"/>
-            <a:ext cx="514563" cy="218640"/>
+            <a:off x="6728018" y="4085087"/>
+            <a:ext cx="514563" cy="217676"/>
           </a:xfrm>
           <a:prstGeom prst="rect">
             <a:avLst/>
@@ -9875,7 +9875,7 @@
           <a:p>
             <a:pPr algn="r">
               <a:lnSpc>
-                <a:spcPts val="997"/>
+                <a:spcPts val="1022"/>
               </a:lnSpc>
               <a:spcBef>
                 <a:spcPts val="0"/>
@@ -9904,8 +9904,8 @@
         </p:nvSpPr>
         <p:spPr>
           <a:xfrm>
-            <a:off x="7242581" y="4076422"/>
-            <a:ext cx="643204" cy="218640"/>
+            <a:off x="7242581" y="4085087"/>
+            <a:ext cx="643204" cy="217676"/>
           </a:xfrm>
           <a:prstGeom prst="rect">
             <a:avLst/>
@@ -9942,7 +9942,7 @@
           <a:p>
             <a:pPr algn="ctr">
               <a:lnSpc>
-                <a:spcPts val="997"/>
+                <a:spcPts val="1022"/>
               </a:lnSpc>
               <a:spcBef>
                 <a:spcPts val="0"/>
@@ -9971,8 +9971,8 @@
         </p:nvSpPr>
         <p:spPr>
           <a:xfrm>
-            <a:off x="7885785" y="4076422"/>
-            <a:ext cx="643204" cy="218640"/>
+            <a:off x="7885785" y="4085087"/>
+            <a:ext cx="643204" cy="217676"/>
           </a:xfrm>
           <a:prstGeom prst="rect">
             <a:avLst/>
@@ -10009,7 +10009,7 @@
           <a:p>
             <a:pPr algn="ctr">
               <a:lnSpc>
-                <a:spcPts val="997"/>
+                <a:spcPts val="1022"/>
               </a:lnSpc>
               <a:spcBef>
                 <a:spcPts val="0"/>
@@ -10038,8 +10038,8 @@
         </p:nvSpPr>
         <p:spPr>
           <a:xfrm>
-            <a:off x="8528989" y="4076422"/>
-            <a:ext cx="643205" cy="218640"/>
+            <a:off x="8528989" y="4085087"/>
+            <a:ext cx="643205" cy="217676"/>
           </a:xfrm>
           <a:prstGeom prst="rect">
             <a:avLst/>
@@ -10076,7 +10076,7 @@
           <a:p>
             <a:pPr algn="ctr">
               <a:lnSpc>
-                <a:spcPts val="997"/>
+                <a:spcPts val="1022"/>
               </a:lnSpc>
               <a:spcBef>
                 <a:spcPts val="0"/>
@@ -10105,8 +10105,8 @@
         </p:nvSpPr>
         <p:spPr>
           <a:xfrm>
-            <a:off x="3897920" y="4295062"/>
-            <a:ext cx="2315535" cy="218640"/>
+            <a:off x="3897920" y="4302763"/>
+            <a:ext cx="2315535" cy="217676"/>
           </a:xfrm>
           <a:prstGeom prst="rect">
             <a:avLst/>
@@ -10143,7 +10143,7 @@
           <a:p>
             <a:pPr algn="l">
               <a:lnSpc>
-                <a:spcPts val="997"/>
+                <a:spcPts val="1022"/>
               </a:lnSpc>
               <a:spcBef>
                 <a:spcPts val="0"/>
@@ -10199,8 +10199,8 @@
         </p:nvSpPr>
         <p:spPr>
           <a:xfrm>
-            <a:off x="6213455" y="4295062"/>
-            <a:ext cx="514563" cy="218640"/>
+            <a:off x="6213455" y="4302763"/>
+            <a:ext cx="514563" cy="217676"/>
           </a:xfrm>
           <a:prstGeom prst="rect">
             <a:avLst/>
@@ -10245,8 +10245,8 @@
         </p:nvSpPr>
         <p:spPr>
           <a:xfrm>
-            <a:off x="6351417" y="4336465"/>
-            <a:ext cx="238638" cy="135834"/>
+            <a:off x="6351417" y="4342100"/>
+            <a:ext cx="238638" cy="139001"/>
           </a:xfrm>
           <a:prstGeom prst="roundRect">
             <a:avLst>
@@ -10309,8 +10309,8 @@
         </p:nvSpPr>
         <p:spPr>
           <a:xfrm>
-            <a:off x="6728018" y="4295062"/>
-            <a:ext cx="514563" cy="218640"/>
+            <a:off x="6728018" y="4302763"/>
+            <a:ext cx="514563" cy="217676"/>
           </a:xfrm>
           <a:prstGeom prst="rect">
             <a:avLst/>
@@ -10347,7 +10347,7 @@
           <a:p>
             <a:pPr algn="r">
               <a:lnSpc>
-                <a:spcPts val="997"/>
+                <a:spcPts val="1022"/>
               </a:lnSpc>
               <a:spcBef>
                 <a:spcPts val="0"/>
@@ -10376,8 +10376,8 @@
         </p:nvSpPr>
         <p:spPr>
           <a:xfrm>
-            <a:off x="7242581" y="4295062"/>
-            <a:ext cx="643204" cy="218640"/>
+            <a:off x="7242581" y="4302763"/>
+            <a:ext cx="643204" cy="217676"/>
           </a:xfrm>
           <a:prstGeom prst="rect">
             <a:avLst/>
@@ -10414,7 +10414,7 @@
           <a:p>
             <a:pPr algn="ctr">
               <a:lnSpc>
-                <a:spcPts val="997"/>
+                <a:spcPts val="1022"/>
               </a:lnSpc>
               <a:spcBef>
                 <a:spcPts val="0"/>
@@ -10443,8 +10443,8 @@
         </p:nvSpPr>
         <p:spPr>
           <a:xfrm>
-            <a:off x="7885785" y="4295062"/>
-            <a:ext cx="643204" cy="218640"/>
+            <a:off x="7885785" y="4302763"/>
+            <a:ext cx="643204" cy="217676"/>
           </a:xfrm>
           <a:prstGeom prst="rect">
             <a:avLst/>
@@ -10481,7 +10481,7 @@
           <a:p>
             <a:pPr algn="ctr">
               <a:lnSpc>
-                <a:spcPts val="997"/>
+                <a:spcPts val="1022"/>
               </a:lnSpc>
               <a:spcBef>
                 <a:spcPts val="0"/>
@@ -10510,8 +10510,8 @@
         </p:nvSpPr>
         <p:spPr>
           <a:xfrm>
-            <a:off x="8528989" y="4295062"/>
-            <a:ext cx="643205" cy="218640"/>
+            <a:off x="8528989" y="4302763"/>
+            <a:ext cx="643205" cy="217676"/>
           </a:xfrm>
           <a:prstGeom prst="rect">
             <a:avLst/>
@@ -10548,7 +10548,7 @@
           <a:p>
             <a:pPr algn="ctr">
               <a:lnSpc>
-                <a:spcPts val="997"/>
+                <a:spcPts val="1022"/>
               </a:lnSpc>
               <a:spcBef>
                 <a:spcPts val="0"/>
@@ -10577,8 +10577,8 @@
         </p:nvSpPr>
         <p:spPr>
           <a:xfrm>
-            <a:off x="2740152" y="4513702"/>
-            <a:ext cx="1157768" cy="655920"/>
+            <a:off x="2740152" y="4520439"/>
+            <a:ext cx="1157768" cy="653028"/>
           </a:xfrm>
           <a:prstGeom prst="rect">
             <a:avLst/>
@@ -10615,7 +10615,7 @@
           <a:p>
             <a:pPr algn="l">
               <a:lnSpc>
-                <a:spcPts val="997"/>
+                <a:spcPts val="1022"/>
               </a:lnSpc>
               <a:spcBef>
                 <a:spcPts val="0"/>
@@ -10662,8 +10662,8 @@
         </p:nvSpPr>
         <p:spPr>
           <a:xfrm>
-            <a:off x="3897920" y="4513702"/>
-            <a:ext cx="2315535" cy="218640"/>
+            <a:off x="3897920" y="4520439"/>
+            <a:ext cx="2315535" cy="217676"/>
           </a:xfrm>
           <a:prstGeom prst="rect">
             <a:avLst/>
@@ -10700,7 +10700,7 @@
           <a:p>
             <a:pPr algn="l">
               <a:lnSpc>
-                <a:spcPts val="997"/>
+                <a:spcPts val="1022"/>
               </a:lnSpc>
               <a:spcBef>
                 <a:spcPts val="0"/>
@@ -10756,8 +10756,8 @@
         </p:nvSpPr>
         <p:spPr>
           <a:xfrm>
-            <a:off x="6213455" y="4513702"/>
-            <a:ext cx="514563" cy="218640"/>
+            <a:off x="6213455" y="4520439"/>
+            <a:ext cx="514563" cy="217676"/>
           </a:xfrm>
           <a:prstGeom prst="rect">
             <a:avLst/>
@@ -10802,8 +10802,8 @@
         </p:nvSpPr>
         <p:spPr>
           <a:xfrm>
-            <a:off x="6348580" y="4555105"/>
-            <a:ext cx="244313" cy="135834"/>
+            <a:off x="6348580" y="4559776"/>
+            <a:ext cx="244313" cy="139001"/>
           </a:xfrm>
           <a:prstGeom prst="roundRect">
             <a:avLst>
@@ -10866,8 +10866,8 @@
         </p:nvSpPr>
         <p:spPr>
           <a:xfrm>
-            <a:off x="6728018" y="4513702"/>
-            <a:ext cx="514563" cy="218640"/>
+            <a:off x="6728018" y="4520439"/>
+            <a:ext cx="514563" cy="217676"/>
           </a:xfrm>
           <a:prstGeom prst="rect">
             <a:avLst/>
@@ -10904,7 +10904,7 @@
           <a:p>
             <a:pPr algn="r">
               <a:lnSpc>
-                <a:spcPts val="997"/>
+                <a:spcPts val="1022"/>
               </a:lnSpc>
               <a:spcBef>
                 <a:spcPts val="0"/>
@@ -10933,8 +10933,8 @@
         </p:nvSpPr>
         <p:spPr>
           <a:xfrm>
-            <a:off x="7242581" y="4513702"/>
-            <a:ext cx="643204" cy="218640"/>
+            <a:off x="7242581" y="4520439"/>
+            <a:ext cx="643204" cy="217676"/>
           </a:xfrm>
           <a:prstGeom prst="rect">
             <a:avLst/>
@@ -10971,7 +10971,7 @@
           <a:p>
             <a:pPr algn="ctr">
               <a:lnSpc>
-                <a:spcPts val="997"/>
+                <a:spcPts val="1022"/>
               </a:lnSpc>
               <a:spcBef>
                 <a:spcPts val="0"/>
@@ -11000,8 +11000,8 @@
         </p:nvSpPr>
         <p:spPr>
           <a:xfrm>
-            <a:off x="7885785" y="4513702"/>
-            <a:ext cx="643204" cy="218640"/>
+            <a:off x="7885785" y="4520439"/>
+            <a:ext cx="643204" cy="217676"/>
           </a:xfrm>
           <a:prstGeom prst="rect">
             <a:avLst/>
@@ -11038,7 +11038,7 @@
           <a:p>
             <a:pPr algn="ctr">
               <a:lnSpc>
-                <a:spcPts val="997"/>
+                <a:spcPts val="1022"/>
               </a:lnSpc>
               <a:spcBef>
                 <a:spcPts val="0"/>
@@ -11067,8 +11067,8 @@
         </p:nvSpPr>
         <p:spPr>
           <a:xfrm>
-            <a:off x="8528989" y="4513702"/>
-            <a:ext cx="643205" cy="218640"/>
+            <a:off x="8528989" y="4520439"/>
+            <a:ext cx="643205" cy="217676"/>
           </a:xfrm>
           <a:prstGeom prst="rect">
             <a:avLst/>
@@ -11105,7 +11105,7 @@
           <a:p>
             <a:pPr algn="ctr">
               <a:lnSpc>
-                <a:spcPts val="997"/>
+                <a:spcPts val="1022"/>
               </a:lnSpc>
               <a:spcBef>
                 <a:spcPts val="0"/>
@@ -11134,8 +11134,8 @@
         </p:nvSpPr>
         <p:spPr>
           <a:xfrm>
-            <a:off x="3897920" y="4732342"/>
-            <a:ext cx="2315535" cy="218640"/>
+            <a:off x="3897920" y="4738115"/>
+            <a:ext cx="2315535" cy="217676"/>
           </a:xfrm>
           <a:prstGeom prst="rect">
             <a:avLst/>
@@ -11172,7 +11172,7 @@
           <a:p>
             <a:pPr algn="l">
               <a:lnSpc>
-                <a:spcPts val="997"/>
+                <a:spcPts val="1022"/>
               </a:lnSpc>
               <a:spcBef>
                 <a:spcPts val="0"/>
@@ -11210,8 +11210,8 @@
         </p:nvSpPr>
         <p:spPr>
           <a:xfrm>
-            <a:off x="6213455" y="4732342"/>
-            <a:ext cx="514563" cy="218640"/>
+            <a:off x="6213455" y="4738115"/>
+            <a:ext cx="514563" cy="217676"/>
           </a:xfrm>
           <a:prstGeom prst="rect">
             <a:avLst/>
@@ -11256,8 +11256,8 @@
         </p:nvSpPr>
         <p:spPr>
           <a:xfrm>
-            <a:off x="6352580" y="4773745"/>
-            <a:ext cx="236313" cy="135834"/>
+            <a:off x="6352580" y="4777452"/>
+            <a:ext cx="236313" cy="139001"/>
           </a:xfrm>
           <a:prstGeom prst="roundRect">
             <a:avLst>
@@ -11320,8 +11320,8 @@
         </p:nvSpPr>
         <p:spPr>
           <a:xfrm>
-            <a:off x="6728018" y="4732342"/>
-            <a:ext cx="514563" cy="218640"/>
+            <a:off x="6728018" y="4738115"/>
+            <a:ext cx="514563" cy="217676"/>
           </a:xfrm>
           <a:prstGeom prst="rect">
             <a:avLst/>
@@ -11358,7 +11358,7 @@
           <a:p>
             <a:pPr algn="r">
               <a:lnSpc>
-                <a:spcPts val="997"/>
+                <a:spcPts val="1022"/>
               </a:lnSpc>
               <a:spcBef>
                 <a:spcPts val="0"/>
@@ -11387,8 +11387,8 @@
         </p:nvSpPr>
         <p:spPr>
           <a:xfrm>
-            <a:off x="7242581" y="4732342"/>
-            <a:ext cx="643204" cy="218640"/>
+            <a:off x="7242581" y="4738115"/>
+            <a:ext cx="643204" cy="217676"/>
           </a:xfrm>
           <a:prstGeom prst="rect">
             <a:avLst/>
@@ -11425,7 +11425,7 @@
           <a:p>
             <a:pPr algn="ctr">
               <a:lnSpc>
-                <a:spcPts val="997"/>
+                <a:spcPts val="1022"/>
               </a:lnSpc>
               <a:spcBef>
                 <a:spcPts val="0"/>
@@ -11454,8 +11454,8 @@
         </p:nvSpPr>
         <p:spPr>
           <a:xfrm>
-            <a:off x="7885785" y="4732342"/>
-            <a:ext cx="643204" cy="218640"/>
+            <a:off x="7885785" y="4738115"/>
+            <a:ext cx="643204" cy="217676"/>
           </a:xfrm>
           <a:prstGeom prst="rect">
             <a:avLst/>
@@ -11492,7 +11492,7 @@
           <a:p>
             <a:pPr algn="ctr">
               <a:lnSpc>
-                <a:spcPts val="997"/>
+                <a:spcPts val="1022"/>
               </a:lnSpc>
               <a:spcBef>
                 <a:spcPts val="0"/>
@@ -11521,8 +11521,8 @@
         </p:nvSpPr>
         <p:spPr>
           <a:xfrm>
-            <a:off x="8528989" y="4732342"/>
-            <a:ext cx="643205" cy="218640"/>
+            <a:off x="8528989" y="4738115"/>
+            <a:ext cx="643205" cy="217676"/>
           </a:xfrm>
           <a:prstGeom prst="rect">
             <a:avLst/>
@@ -11559,7 +11559,7 @@
           <a:p>
             <a:pPr algn="ctr">
               <a:lnSpc>
-                <a:spcPts val="997"/>
+                <a:spcPts val="1022"/>
               </a:lnSpc>
               <a:spcBef>
                 <a:spcPts val="0"/>
@@ -11588,8 +11588,8 @@
         </p:nvSpPr>
         <p:spPr>
           <a:xfrm>
-            <a:off x="3897920" y="4950982"/>
-            <a:ext cx="2315535" cy="218640"/>
+            <a:off x="3897920" y="4955791"/>
+            <a:ext cx="2315535" cy="217676"/>
           </a:xfrm>
           <a:prstGeom prst="rect">
             <a:avLst/>
@@ -11626,7 +11626,7 @@
           <a:p>
             <a:pPr algn="l">
               <a:lnSpc>
-                <a:spcPts val="997"/>
+                <a:spcPts val="1022"/>
               </a:lnSpc>
               <a:spcBef>
                 <a:spcPts val="0"/>
@@ -11700,8 +11700,8 @@
         </p:nvSpPr>
         <p:spPr>
           <a:xfrm>
-            <a:off x="6213455" y="4950982"/>
-            <a:ext cx="514563" cy="218640"/>
+            <a:off x="6213455" y="4955791"/>
+            <a:ext cx="514563" cy="217676"/>
           </a:xfrm>
           <a:prstGeom prst="rect">
             <a:avLst/>
@@ -11746,8 +11746,8 @@
         </p:nvSpPr>
         <p:spPr>
           <a:xfrm>
-            <a:off x="6352580" y="4992385"/>
-            <a:ext cx="236313" cy="135834"/>
+            <a:off x="6352580" y="4995128"/>
+            <a:ext cx="236313" cy="139001"/>
           </a:xfrm>
           <a:prstGeom prst="roundRect">
             <a:avLst>
@@ -11810,8 +11810,8 @@
         </p:nvSpPr>
         <p:spPr>
           <a:xfrm>
-            <a:off x="6728018" y="4950982"/>
-            <a:ext cx="514563" cy="218640"/>
+            <a:off x="6728018" y="4955791"/>
+            <a:ext cx="514563" cy="217676"/>
           </a:xfrm>
           <a:prstGeom prst="rect">
             <a:avLst/>
@@ -11848,7 +11848,7 @@
           <a:p>
             <a:pPr algn="r">
               <a:lnSpc>
-                <a:spcPts val="997"/>
+                <a:spcPts val="1022"/>
               </a:lnSpc>
               <a:spcBef>
                 <a:spcPts val="0"/>
@@ -11877,8 +11877,8 @@
         </p:nvSpPr>
         <p:spPr>
           <a:xfrm>
-            <a:off x="7242581" y="4950982"/>
-            <a:ext cx="643204" cy="218640"/>
+            <a:off x="7242581" y="4955791"/>
+            <a:ext cx="643204" cy="217676"/>
           </a:xfrm>
           <a:prstGeom prst="rect">
             <a:avLst/>
@@ -11915,7 +11915,7 @@
           <a:p>
             <a:pPr algn="ctr">
               <a:lnSpc>
-                <a:spcPts val="997"/>
+                <a:spcPts val="1022"/>
               </a:lnSpc>
               <a:spcBef>
                 <a:spcPts val="0"/>
@@ -11944,8 +11944,8 @@
         </p:nvSpPr>
         <p:spPr>
           <a:xfrm>
-            <a:off x="7885785" y="4950982"/>
-            <a:ext cx="643204" cy="218640"/>
+            <a:off x="7885785" y="4955791"/>
+            <a:ext cx="643204" cy="217676"/>
           </a:xfrm>
           <a:prstGeom prst="rect">
             <a:avLst/>
@@ -11982,7 +11982,7 @@
           <a:p>
             <a:pPr algn="ctr">
               <a:lnSpc>
-                <a:spcPts val="997"/>
+                <a:spcPts val="1022"/>
               </a:lnSpc>
               <a:spcBef>
                 <a:spcPts val="0"/>
@@ -12011,8 +12011,8 @@
         </p:nvSpPr>
         <p:spPr>
           <a:xfrm>
-            <a:off x="8528989" y="4950982"/>
-            <a:ext cx="643205" cy="218640"/>
+            <a:off x="8528989" y="4955791"/>
+            <a:ext cx="643205" cy="217676"/>
           </a:xfrm>
           <a:prstGeom prst="rect">
             <a:avLst/>
@@ -12049,7 +12049,7 @@
           <a:p>
             <a:pPr algn="ctr">
               <a:lnSpc>
-                <a:spcPts val="997"/>
+                <a:spcPts val="1022"/>
               </a:lnSpc>
               <a:spcBef>
                 <a:spcPts val="0"/>
@@ -12078,8 +12078,8 @@
         </p:nvSpPr>
         <p:spPr>
           <a:xfrm>
-            <a:off x="2740152" y="5169622"/>
-            <a:ext cx="1157768" cy="874560"/>
+            <a:off x="2740152" y="5173467"/>
+            <a:ext cx="1157768" cy="870704"/>
           </a:xfrm>
           <a:prstGeom prst="rect">
             <a:avLst/>
@@ -12116,7 +12116,7 @@
           <a:p>
             <a:pPr algn="l">
               <a:lnSpc>
-                <a:spcPts val="997"/>
+                <a:spcPts val="1022"/>
               </a:lnSpc>
               <a:spcBef>
                 <a:spcPts val="0"/>
@@ -12145,8 +12145,8 @@
         </p:nvSpPr>
         <p:spPr>
           <a:xfrm>
-            <a:off x="3897920" y="5169622"/>
-            <a:ext cx="2315535" cy="218640"/>
+            <a:off x="3897920" y="5173467"/>
+            <a:ext cx="2315535" cy="217676"/>
           </a:xfrm>
           <a:prstGeom prst="rect">
             <a:avLst/>
@@ -12183,7 +12183,7 @@
           <a:p>
             <a:pPr algn="l">
               <a:lnSpc>
-                <a:spcPts val="997"/>
+                <a:spcPts val="1022"/>
               </a:lnSpc>
               <a:spcBef>
                 <a:spcPts val="0"/>
@@ -12230,8 +12230,8 @@
         </p:nvSpPr>
         <p:spPr>
           <a:xfrm>
-            <a:off x="6213455" y="5169622"/>
-            <a:ext cx="514563" cy="218640"/>
+            <a:off x="6213455" y="5173467"/>
+            <a:ext cx="514563" cy="217676"/>
           </a:xfrm>
           <a:prstGeom prst="rect">
             <a:avLst/>
@@ -12276,8 +12276,8 @@
         </p:nvSpPr>
         <p:spPr>
           <a:xfrm>
-            <a:off x="6351417" y="5211025"/>
-            <a:ext cx="238638" cy="135834"/>
+            <a:off x="6351417" y="5212804"/>
+            <a:ext cx="238638" cy="139001"/>
           </a:xfrm>
           <a:prstGeom prst="roundRect">
             <a:avLst>
@@ -12340,8 +12340,8 @@
         </p:nvSpPr>
         <p:spPr>
           <a:xfrm>
-            <a:off x="6728018" y="5169622"/>
-            <a:ext cx="514563" cy="218640"/>
+            <a:off x="6728018" y="5173467"/>
+            <a:ext cx="514563" cy="217676"/>
           </a:xfrm>
           <a:prstGeom prst="rect">
             <a:avLst/>
@@ -12378,7 +12378,7 @@
           <a:p>
             <a:pPr algn="r">
               <a:lnSpc>
-                <a:spcPts val="997"/>
+                <a:spcPts val="1022"/>
               </a:lnSpc>
               <a:spcBef>
                 <a:spcPts val="0"/>
@@ -12407,8 +12407,8 @@
         </p:nvSpPr>
         <p:spPr>
           <a:xfrm>
-            <a:off x="7242581" y="5169622"/>
-            <a:ext cx="643204" cy="218640"/>
+            <a:off x="7242581" y="5173467"/>
+            <a:ext cx="643204" cy="217676"/>
           </a:xfrm>
           <a:prstGeom prst="rect">
             <a:avLst/>
@@ -12445,7 +12445,7 @@
           <a:p>
             <a:pPr algn="ctr">
               <a:lnSpc>
-                <a:spcPts val="997"/>
+                <a:spcPts val="1022"/>
               </a:lnSpc>
               <a:spcBef>
                 <a:spcPts val="0"/>
@@ -12474,8 +12474,8 @@
         </p:nvSpPr>
         <p:spPr>
           <a:xfrm>
-            <a:off x="7885785" y="5169622"/>
-            <a:ext cx="643204" cy="218640"/>
+            <a:off x="7885785" y="5173467"/>
+            <a:ext cx="643204" cy="217676"/>
           </a:xfrm>
           <a:prstGeom prst="rect">
             <a:avLst/>
@@ -12512,7 +12512,7 @@
           <a:p>
             <a:pPr algn="ctr">
               <a:lnSpc>
-                <a:spcPts val="997"/>
+                <a:spcPts val="1022"/>
               </a:lnSpc>
               <a:spcBef>
                 <a:spcPts val="0"/>
@@ -12541,8 +12541,8 @@
         </p:nvSpPr>
         <p:spPr>
           <a:xfrm>
-            <a:off x="8528989" y="5169622"/>
-            <a:ext cx="643205" cy="218640"/>
+            <a:off x="8528989" y="5173467"/>
+            <a:ext cx="643205" cy="217676"/>
           </a:xfrm>
           <a:prstGeom prst="rect">
             <a:avLst/>
@@ -12579,7 +12579,7 @@
           <a:p>
             <a:pPr algn="ctr">
               <a:lnSpc>
-                <a:spcPts val="997"/>
+                <a:spcPts val="1022"/>
               </a:lnSpc>
               <a:spcBef>
                 <a:spcPts val="0"/>
@@ -12608,8 +12608,8 @@
         </p:nvSpPr>
         <p:spPr>
           <a:xfrm>
-            <a:off x="3897920" y="5388262"/>
-            <a:ext cx="2315535" cy="218640"/>
+            <a:off x="3897920" y="5391143"/>
+            <a:ext cx="2315535" cy="217676"/>
           </a:xfrm>
           <a:prstGeom prst="rect">
             <a:avLst/>
@@ -12646,7 +12646,7 @@
           <a:p>
             <a:pPr algn="l">
               <a:lnSpc>
-                <a:spcPts val="997"/>
+                <a:spcPts val="1022"/>
               </a:lnSpc>
               <a:spcBef>
                 <a:spcPts val="0"/>
@@ -12702,8 +12702,8 @@
         </p:nvSpPr>
         <p:spPr>
           <a:xfrm>
-            <a:off x="6213455" y="5388262"/>
-            <a:ext cx="514563" cy="218640"/>
+            <a:off x="6213455" y="5391143"/>
+            <a:ext cx="514563" cy="217676"/>
           </a:xfrm>
           <a:prstGeom prst="rect">
             <a:avLst/>
@@ -12748,8 +12748,8 @@
         </p:nvSpPr>
         <p:spPr>
           <a:xfrm>
-            <a:off x="6351417" y="5429665"/>
-            <a:ext cx="238638" cy="135834"/>
+            <a:off x="6351417" y="5430480"/>
+            <a:ext cx="238638" cy="139001"/>
           </a:xfrm>
           <a:prstGeom prst="roundRect">
             <a:avLst>
@@ -12812,8 +12812,8 @@
         </p:nvSpPr>
         <p:spPr>
           <a:xfrm>
-            <a:off x="6728018" y="5388262"/>
-            <a:ext cx="514563" cy="218640"/>
+            <a:off x="6728018" y="5391143"/>
+            <a:ext cx="514563" cy="217676"/>
           </a:xfrm>
           <a:prstGeom prst="rect">
             <a:avLst/>
@@ -12850,7 +12850,7 @@
           <a:p>
             <a:pPr algn="r">
               <a:lnSpc>
-                <a:spcPts val="997"/>
+                <a:spcPts val="1022"/>
               </a:lnSpc>
               <a:spcBef>
                 <a:spcPts val="0"/>
@@ -12879,8 +12879,8 @@
         </p:nvSpPr>
         <p:spPr>
           <a:xfrm>
-            <a:off x="7242581" y="5388262"/>
-            <a:ext cx="643204" cy="218640"/>
+            <a:off x="7242581" y="5391143"/>
+            <a:ext cx="643204" cy="217676"/>
           </a:xfrm>
           <a:prstGeom prst="rect">
             <a:avLst/>
@@ -12917,7 +12917,7 @@
           <a:p>
             <a:pPr algn="ctr">
               <a:lnSpc>
-                <a:spcPts val="997"/>
+                <a:spcPts val="1022"/>
               </a:lnSpc>
               <a:spcBef>
                 <a:spcPts val="0"/>
@@ -12946,8 +12946,8 @@
         </p:nvSpPr>
         <p:spPr>
           <a:xfrm>
-            <a:off x="7885785" y="5388262"/>
-            <a:ext cx="643204" cy="218640"/>
+            <a:off x="7885785" y="5391143"/>
+            <a:ext cx="643204" cy="217676"/>
           </a:xfrm>
           <a:prstGeom prst="rect">
             <a:avLst/>
@@ -12984,7 +12984,7 @@
           <a:p>
             <a:pPr algn="ctr">
               <a:lnSpc>
-                <a:spcPts val="997"/>
+                <a:spcPts val="1022"/>
               </a:lnSpc>
               <a:spcBef>
                 <a:spcPts val="0"/>
@@ -13013,8 +13013,8 @@
         </p:nvSpPr>
         <p:spPr>
           <a:xfrm>
-            <a:off x="8528989" y="5388262"/>
-            <a:ext cx="643205" cy="218640"/>
+            <a:off x="8528989" y="5391143"/>
+            <a:ext cx="643205" cy="217676"/>
           </a:xfrm>
           <a:prstGeom prst="rect">
             <a:avLst/>
@@ -13051,7 +13051,7 @@
           <a:p>
             <a:pPr algn="ctr">
               <a:lnSpc>
-                <a:spcPts val="997"/>
+                <a:spcPts val="1022"/>
               </a:lnSpc>
               <a:spcBef>
                 <a:spcPts val="0"/>
@@ -13080,8 +13080,8 @@
         </p:nvSpPr>
         <p:spPr>
           <a:xfrm>
-            <a:off x="3897920" y="5606902"/>
-            <a:ext cx="2315535" cy="218640"/>
+            <a:off x="3897920" y="5608819"/>
+            <a:ext cx="2315535" cy="217676"/>
           </a:xfrm>
           <a:prstGeom prst="rect">
             <a:avLst/>
@@ -13118,7 +13118,7 @@
           <a:p>
             <a:pPr algn="l">
               <a:lnSpc>
-                <a:spcPts val="997"/>
+                <a:spcPts val="1022"/>
               </a:lnSpc>
               <a:spcBef>
                 <a:spcPts val="0"/>
@@ -13183,8 +13183,8 @@
         </p:nvSpPr>
         <p:spPr>
           <a:xfrm>
-            <a:off x="6213455" y="5606902"/>
-            <a:ext cx="514563" cy="218640"/>
+            <a:off x="6213455" y="5608819"/>
+            <a:ext cx="514563" cy="217676"/>
           </a:xfrm>
           <a:prstGeom prst="rect">
             <a:avLst/>
@@ -13229,8 +13229,8 @@
         </p:nvSpPr>
         <p:spPr>
           <a:xfrm>
-            <a:off x="6351417" y="5648305"/>
-            <a:ext cx="238638" cy="135834"/>
+            <a:off x="6351417" y="5648156"/>
+            <a:ext cx="238638" cy="139001"/>
           </a:xfrm>
           <a:prstGeom prst="roundRect">
             <a:avLst>
@@ -13293,8 +13293,8 @@
         </p:nvSpPr>
         <p:spPr>
           <a:xfrm>
-            <a:off x="6728018" y="5606902"/>
-            <a:ext cx="514563" cy="218640"/>
+            <a:off x="6728018" y="5608819"/>
+            <a:ext cx="514563" cy="217676"/>
           </a:xfrm>
           <a:prstGeom prst="rect">
             <a:avLst/>
@@ -13331,7 +13331,7 @@
           <a:p>
             <a:pPr algn="r">
               <a:lnSpc>
-                <a:spcPts val="997"/>
+                <a:spcPts val="1022"/>
               </a:lnSpc>
               <a:spcBef>
                 <a:spcPts val="0"/>
@@ -13360,8 +13360,8 @@
         </p:nvSpPr>
         <p:spPr>
           <a:xfrm>
-            <a:off x="7242581" y="5606902"/>
-            <a:ext cx="643204" cy="218640"/>
+            <a:off x="7242581" y="5608819"/>
+            <a:ext cx="643204" cy="217676"/>
           </a:xfrm>
           <a:prstGeom prst="rect">
             <a:avLst/>
@@ -13398,7 +13398,7 @@
           <a:p>
             <a:pPr algn="ctr">
               <a:lnSpc>
-                <a:spcPts val="997"/>
+                <a:spcPts val="1022"/>
               </a:lnSpc>
               <a:spcBef>
                 <a:spcPts val="0"/>
@@ -13427,8 +13427,8 @@
         </p:nvSpPr>
         <p:spPr>
           <a:xfrm>
-            <a:off x="7885785" y="5606902"/>
-            <a:ext cx="643204" cy="218640"/>
+            <a:off x="7885785" y="5608819"/>
+            <a:ext cx="643204" cy="217676"/>
           </a:xfrm>
           <a:prstGeom prst="rect">
             <a:avLst/>
@@ -13465,7 +13465,7 @@
           <a:p>
             <a:pPr algn="ctr">
               <a:lnSpc>
-                <a:spcPts val="997"/>
+                <a:spcPts val="1022"/>
               </a:lnSpc>
               <a:spcBef>
                 <a:spcPts val="0"/>
@@ -13494,8 +13494,8 @@
         </p:nvSpPr>
         <p:spPr>
           <a:xfrm>
-            <a:off x="8528989" y="5606902"/>
-            <a:ext cx="643205" cy="218640"/>
+            <a:off x="8528989" y="5608819"/>
+            <a:ext cx="643205" cy="217676"/>
           </a:xfrm>
           <a:prstGeom prst="rect">
             <a:avLst/>
@@ -13532,7 +13532,7 @@
           <a:p>
             <a:pPr algn="ctr">
               <a:lnSpc>
-                <a:spcPts val="997"/>
+                <a:spcPts val="1022"/>
               </a:lnSpc>
               <a:spcBef>
                 <a:spcPts val="0"/>
@@ -13561,8 +13561,8 @@
         </p:nvSpPr>
         <p:spPr>
           <a:xfrm>
-            <a:off x="3897920" y="5825542"/>
-            <a:ext cx="2315535" cy="218640"/>
+            <a:off x="3897920" y="5826495"/>
+            <a:ext cx="2315535" cy="217676"/>
           </a:xfrm>
           <a:prstGeom prst="rect">
             <a:avLst/>
@@ -13599,7 +13599,7 @@
           <a:p>
             <a:pPr algn="l">
               <a:lnSpc>
-                <a:spcPts val="997"/>
+                <a:spcPts val="1022"/>
               </a:lnSpc>
               <a:spcBef>
                 <a:spcPts val="0"/>
@@ -13673,8 +13673,8 @@
         </p:nvSpPr>
         <p:spPr>
           <a:xfrm>
-            <a:off x="6213455" y="5825542"/>
-            <a:ext cx="514563" cy="218640"/>
+            <a:off x="6213455" y="5826495"/>
+            <a:ext cx="514563" cy="217676"/>
           </a:xfrm>
           <a:prstGeom prst="rect">
             <a:avLst/>
@@ -13719,8 +13719,8 @@
         </p:nvSpPr>
         <p:spPr>
           <a:xfrm>
-            <a:off x="6352580" y="5866945"/>
-            <a:ext cx="236313" cy="135834"/>
+            <a:off x="6352580" y="5865832"/>
+            <a:ext cx="236313" cy="139001"/>
           </a:xfrm>
           <a:prstGeom prst="roundRect">
             <a:avLst>
@@ -13783,8 +13783,8 @@
         </p:nvSpPr>
         <p:spPr>
           <a:xfrm>
-            <a:off x="6728018" y="5825542"/>
-            <a:ext cx="514563" cy="218640"/>
+            <a:off x="6728018" y="5826495"/>
+            <a:ext cx="514563" cy="217676"/>
           </a:xfrm>
           <a:prstGeom prst="rect">
             <a:avLst/>
@@ -13821,7 +13821,7 @@
           <a:p>
             <a:pPr algn="r">
               <a:lnSpc>
-                <a:spcPts val="997"/>
+                <a:spcPts val="1022"/>
               </a:lnSpc>
               <a:spcBef>
                 <a:spcPts val="0"/>
@@ -13850,8 +13850,8 @@
         </p:nvSpPr>
         <p:spPr>
           <a:xfrm>
-            <a:off x="7242581" y="5825542"/>
-            <a:ext cx="643204" cy="218640"/>
+            <a:off x="7242581" y="5826495"/>
+            <a:ext cx="643204" cy="217676"/>
           </a:xfrm>
           <a:prstGeom prst="rect">
             <a:avLst/>
@@ -13888,7 +13888,7 @@
           <a:p>
             <a:pPr algn="ctr">
               <a:lnSpc>
-                <a:spcPts val="997"/>
+                <a:spcPts val="1022"/>
               </a:lnSpc>
               <a:spcBef>
                 <a:spcPts val="0"/>
@@ -13917,8 +13917,8 @@
         </p:nvSpPr>
         <p:spPr>
           <a:xfrm>
-            <a:off x="7885785" y="5825542"/>
-            <a:ext cx="643204" cy="218640"/>
+            <a:off x="7885785" y="5826495"/>
+            <a:ext cx="643204" cy="217676"/>
           </a:xfrm>
           <a:prstGeom prst="rect">
             <a:avLst/>
@@ -13955,7 +13955,7 @@
           <a:p>
             <a:pPr algn="ctr">
               <a:lnSpc>
-                <a:spcPts val="997"/>
+                <a:spcPts val="1022"/>
               </a:lnSpc>
               <a:spcBef>
                 <a:spcPts val="0"/>
@@ -13984,8 +13984,8 @@
         </p:nvSpPr>
         <p:spPr>
           <a:xfrm>
-            <a:off x="8528989" y="5825542"/>
-            <a:ext cx="643205" cy="218640"/>
+            <a:off x="8528989" y="5826495"/>
+            <a:ext cx="643205" cy="217676"/>
           </a:xfrm>
           <a:prstGeom prst="rect">
             <a:avLst/>
@@ -14022,7 +14022,7 @@
           <a:p>
             <a:pPr algn="ctr">
               <a:lnSpc>
-                <a:spcPts val="997"/>
+                <a:spcPts val="1022"/>
               </a:lnSpc>
               <a:spcBef>
                 <a:spcPts val="0"/>
@@ -14051,8 +14051,8 @@
         </p:nvSpPr>
         <p:spPr>
           <a:xfrm>
-            <a:off x="9263634" y="1909770"/>
-            <a:ext cx="2516886" cy="4134414"/>
+            <a:off x="9263634" y="1912937"/>
+            <a:ext cx="2516886" cy="4131247"/>
           </a:xfrm>
           <a:prstGeom prst="rect">
             <a:avLst/>
@@ -14095,8 +14095,8 @@
         </p:nvSpPr>
         <p:spPr>
           <a:xfrm>
-            <a:off x="9327642" y="1973778"/>
-            <a:ext cx="2388870" cy="152028"/>
+            <a:off x="9327642" y="1976945"/>
+            <a:ext cx="2388870" cy="155829"/>
           </a:xfrm>
           <a:prstGeom prst="rect">
             <a:avLst/>
@@ -14111,7 +14111,7 @@
           <a:p>
             <a:pPr algn="ctr">
               <a:lnSpc>
-                <a:spcPts val="1197"/>
+                <a:spcPts val="1227"/>
               </a:lnSpc>
               <a:spcBef>
                 <a:spcPts val="0"/>
@@ -14176,8 +14176,8 @@
         </p:nvSpPr>
         <p:spPr>
           <a:xfrm>
-            <a:off x="9327642" y="2217246"/>
-            <a:ext cx="2388870" cy="754438"/>
+            <a:off x="9327642" y="2224214"/>
+            <a:ext cx="2388870" cy="752115"/>
           </a:xfrm>
           <a:prstGeom prst="rect">
             <a:avLst/>
@@ -14212,7 +14212,7 @@
           <a:p>
             <a:pPr algn="ctr">
               <a:lnSpc>
-                <a:spcPts val="1197"/>
+                <a:spcPts val="1227"/>
               </a:lnSpc>
               <a:spcBef>
                 <a:spcPts val="0"/>
@@ -14288,7 +14288,7 @@
           <a:p>
             <a:pPr algn="ctr">
               <a:lnSpc>
-                <a:spcPts val="1197"/>
+                <a:spcPts val="1227"/>
               </a:lnSpc>
               <a:spcBef>
                 <a:spcPts val="0"/>
@@ -14326,7 +14326,7 @@
         </p:nvSpPr>
         <p:spPr>
           <a:xfrm>
-            <a:off x="10448925" y="2985400"/>
+            <a:off x="10448925" y="2990045"/>
             <a:ext cx="146304" cy="73152"/>
           </a:xfrm>
           <a:prstGeom prst="downArrow">
@@ -14370,8 +14370,8 @@
         </p:nvSpPr>
         <p:spPr>
           <a:xfrm>
-            <a:off x="9327642" y="3072268"/>
-            <a:ext cx="2388870" cy="754438"/>
+            <a:off x="9327642" y="3076913"/>
+            <a:ext cx="2388870" cy="752115"/>
           </a:xfrm>
           <a:prstGeom prst="rect">
             <a:avLst/>
@@ -14406,7 +14406,7 @@
           <a:p>
             <a:pPr algn="ctr">
               <a:lnSpc>
-                <a:spcPts val="1197"/>
+                <a:spcPts val="1227"/>
               </a:lnSpc>
               <a:spcBef>
                 <a:spcPts val="0"/>
@@ -14464,7 +14464,7 @@
           <a:p>
             <a:pPr algn="ctr">
               <a:lnSpc>
-                <a:spcPts val="1197"/>
+                <a:spcPts val="1227"/>
               </a:lnSpc>
               <a:spcBef>
                 <a:spcPts val="0"/>
@@ -14538,7 +14538,7 @@
         </p:nvSpPr>
         <p:spPr>
           <a:xfrm>
-            <a:off x="10448925" y="3840422"/>
+            <a:off x="10448925" y="3842744"/>
             <a:ext cx="146304" cy="73152"/>
           </a:xfrm>
           <a:prstGeom prst="downArrow">
@@ -14582,8 +14582,8 @@
         </p:nvSpPr>
         <p:spPr>
           <a:xfrm>
-            <a:off x="9327642" y="3927290"/>
-            <a:ext cx="2388870" cy="754438"/>
+            <a:off x="9327642" y="3929612"/>
+            <a:ext cx="2388870" cy="752115"/>
           </a:xfrm>
           <a:prstGeom prst="rect">
             <a:avLst/>
@@ -14618,7 +14618,7 @@
           <a:p>
             <a:pPr algn="ctr">
               <a:lnSpc>
-                <a:spcPts val="1197"/>
+                <a:spcPts val="1227"/>
               </a:lnSpc>
               <a:spcBef>
                 <a:spcPts val="0"/>
@@ -14665,7 +14665,7 @@
         </p:nvSpPr>
         <p:spPr>
           <a:xfrm>
-            <a:off x="9327642" y="4773168"/>
+            <a:off x="9327642" y="4773167"/>
             <a:ext cx="2388870" cy="228600"/>
           </a:xfrm>
           <a:prstGeom prst="rect">
@@ -14707,7 +14707,7 @@
         </p:nvSpPr>
         <p:spPr>
           <a:xfrm>
-            <a:off x="9327642" y="5029200"/>
+            <a:off x="9327642" y="5029199"/>
             <a:ext cx="2388870" cy="420624"/>
           </a:xfrm>
           <a:prstGeom prst="rect">
@@ -14743,7 +14743,7 @@
           <a:p>
             <a:pPr algn="ctr">
               <a:lnSpc>
-                <a:spcPts val="997"/>
+                <a:spcPts val="1022"/>
               </a:lnSpc>
               <a:spcBef>
                 <a:spcPts val="0"/>
@@ -14817,7 +14817,7 @@
         </p:nvSpPr>
         <p:spPr>
           <a:xfrm>
-            <a:off x="9327642" y="5504688"/>
+            <a:off x="9327642" y="5504687"/>
             <a:ext cx="2388870" cy="420624"/>
           </a:xfrm>
           <a:prstGeom prst="rect">
@@ -14853,7 +14853,7 @@
           <a:p>
             <a:pPr algn="ctr">
               <a:lnSpc>
-                <a:spcPts val="997"/>
+                <a:spcPts val="1022"/>
               </a:lnSpc>
               <a:spcBef>
                 <a:spcPts val="0"/>
@@ -14900,8 +14900,8 @@
         </p:nvSpPr>
         <p:spPr>
           <a:xfrm>
-            <a:off x="411480" y="6127143"/>
-            <a:ext cx="11369040" cy="126690"/>
+            <a:off x="411480" y="6125559"/>
+            <a:ext cx="11369040" cy="129857"/>
           </a:xfrm>
           <a:prstGeom prst="rect">
             <a:avLst/>
@@ -14916,7 +14916,7 @@
           <a:p>
             <a:pPr algn="l">
               <a:lnSpc>
-                <a:spcPts val="997"/>
+                <a:spcPts val="1022"/>
               </a:lnSpc>
               <a:spcBef>
                 <a:spcPts val="0"/>
